--- a/CarboLifeCalc/Resources/DV_CarboCalcReporting.pptx
+++ b/CarboLifeCalc/Resources/DV_CarboCalcReporting.pptx
@@ -536,7 +536,7 @@
             <a:fld id="{B5D9EB1F-1062-4E64-9DED-C7BE8B770281}" type="datetimeFigureOut">
               <a:rPr lang="en-GB" smtClean="0"/>
               <a:pPr/>
-              <a:t>20/10/2025</a:t>
+              <a:t>09/09/2026</a:t>
             </a:fld>
             <a:endParaRPr lang="en-GB" dirty="0"/>
           </a:p>
@@ -940,7 +940,7 @@
           <a:p>
             <a:fld id="{163DE3BF-E3FE-41CB-9CC8-04CC329604A2}" type="datetimeFigureOut">
               <a:rPr lang="en-GB" smtClean="0"/>
-              <a:t>20/10/2025</a:t>
+              <a:t>09/09/2026</a:t>
             </a:fld>
             <a:endParaRPr lang="en-GB"/>
           </a:p>
@@ -1110,7 +1110,7 @@
           <a:p>
             <a:fld id="{163DE3BF-E3FE-41CB-9CC8-04CC329604A2}" type="datetimeFigureOut">
               <a:rPr lang="en-GB" smtClean="0"/>
-              <a:t>20/10/2025</a:t>
+              <a:t>09/09/2026</a:t>
             </a:fld>
             <a:endParaRPr lang="en-GB"/>
           </a:p>
@@ -1290,7 +1290,7 @@
           <a:p>
             <a:fld id="{163DE3BF-E3FE-41CB-9CC8-04CC329604A2}" type="datetimeFigureOut">
               <a:rPr lang="en-GB" smtClean="0"/>
-              <a:t>20/10/2025</a:t>
+              <a:t>09/09/2026</a:t>
             </a:fld>
             <a:endParaRPr lang="en-GB"/>
           </a:p>
@@ -1460,7 +1460,7 @@
           <a:p>
             <a:fld id="{163DE3BF-E3FE-41CB-9CC8-04CC329604A2}" type="datetimeFigureOut">
               <a:rPr lang="en-GB" smtClean="0"/>
-              <a:t>20/10/2025</a:t>
+              <a:t>09/09/2026</a:t>
             </a:fld>
             <a:endParaRPr lang="en-GB"/>
           </a:p>
@@ -1706,7 +1706,7 @@
           <a:p>
             <a:fld id="{163DE3BF-E3FE-41CB-9CC8-04CC329604A2}" type="datetimeFigureOut">
               <a:rPr lang="en-GB" smtClean="0"/>
-              <a:t>20/10/2025</a:t>
+              <a:t>09/09/2026</a:t>
             </a:fld>
             <a:endParaRPr lang="en-GB"/>
           </a:p>
@@ -1938,7 +1938,7 @@
           <a:p>
             <a:fld id="{163DE3BF-E3FE-41CB-9CC8-04CC329604A2}" type="datetimeFigureOut">
               <a:rPr lang="en-GB" smtClean="0"/>
-              <a:t>20/10/2025</a:t>
+              <a:t>09/09/2026</a:t>
             </a:fld>
             <a:endParaRPr lang="en-GB"/>
           </a:p>
@@ -2305,7 +2305,7 @@
           <a:p>
             <a:fld id="{163DE3BF-E3FE-41CB-9CC8-04CC329604A2}" type="datetimeFigureOut">
               <a:rPr lang="en-GB" smtClean="0"/>
-              <a:t>20/10/2025</a:t>
+              <a:t>09/09/2026</a:t>
             </a:fld>
             <a:endParaRPr lang="en-GB"/>
           </a:p>
@@ -2423,7 +2423,7 @@
           <a:p>
             <a:fld id="{163DE3BF-E3FE-41CB-9CC8-04CC329604A2}" type="datetimeFigureOut">
               <a:rPr lang="en-GB" smtClean="0"/>
-              <a:t>20/10/2025</a:t>
+              <a:t>09/09/2026</a:t>
             </a:fld>
             <a:endParaRPr lang="en-GB"/>
           </a:p>
@@ -2518,7 +2518,7 @@
           <a:p>
             <a:fld id="{163DE3BF-E3FE-41CB-9CC8-04CC329604A2}" type="datetimeFigureOut">
               <a:rPr lang="en-GB" smtClean="0"/>
-              <a:t>20/10/2025</a:t>
+              <a:t>09/09/2026</a:t>
             </a:fld>
             <a:endParaRPr lang="en-GB"/>
           </a:p>
@@ -2795,7 +2795,7 @@
           <a:p>
             <a:fld id="{163DE3BF-E3FE-41CB-9CC8-04CC329604A2}" type="datetimeFigureOut">
               <a:rPr lang="en-GB" smtClean="0"/>
-              <a:t>20/10/2025</a:t>
+              <a:t>09/09/2026</a:t>
             </a:fld>
             <a:endParaRPr lang="en-GB"/>
           </a:p>
@@ -3052,7 +3052,7 @@
           <a:p>
             <a:fld id="{163DE3BF-E3FE-41CB-9CC8-04CC329604A2}" type="datetimeFigureOut">
               <a:rPr lang="en-GB" smtClean="0"/>
-              <a:t>20/10/2025</a:t>
+              <a:t>09/09/2026</a:t>
             </a:fld>
             <a:endParaRPr lang="en-GB"/>
           </a:p>
@@ -3267,7 +3267,7 @@
             <a:fld id="{163DE3BF-E3FE-41CB-9CC8-04CC329604A2}" type="datetimeFigureOut">
               <a:rPr lang="en-GB" smtClean="0"/>
               <a:pPr/>
-              <a:t>20/10/2025</a:t>
+              <a:t>09/09/2026</a:t>
             </a:fld>
             <a:endParaRPr lang="en-GB" dirty="0"/>
           </a:p>
@@ -22637,7 +22637,7 @@
                 <a:effectLst/>
                 <a:latin typeface="Abadi" panose="020B0604020104020204" pitchFamily="34" charset="0"/>
               </a:rPr>
-              <a:t>If downloaded </a:t>
+              <a:t>Downloaded latest release </a:t>
             </a:r>
             <a:r>
               <a:rPr lang="en-GB" sz="1600" dirty="0">
@@ -22696,7 +22696,7 @@
                 </a:solidFill>
                 <a:latin typeface="Abadi" panose="020B0604020104020204" pitchFamily="34" charset="0"/>
               </a:rPr>
-              <a:t>Copy The files to a directory of your choice </a:t>
+              <a:t>Copy the files to a directory of your choice </a:t>
             </a:r>
             <a:br>
               <a:rPr lang="en-GB" sz="1600" dirty="0">

--- a/CarboLifeCalc/Resources/DV_CarboCalcReporting.pptx
+++ b/CarboLifeCalc/Resources/DV_CarboCalcReporting.pptx
@@ -536,7 +536,7 @@
             <a:fld id="{B5D9EB1F-1062-4E64-9DED-C7BE8B770281}" type="datetimeFigureOut">
               <a:rPr lang="en-GB" smtClean="0"/>
               <a:pPr/>
-              <a:t>09/09/2026</a:t>
+              <a:t>15/09/2026</a:t>
             </a:fld>
             <a:endParaRPr lang="en-GB" dirty="0"/>
           </a:p>
@@ -940,7 +940,7 @@
           <a:p>
             <a:fld id="{163DE3BF-E3FE-41CB-9CC8-04CC329604A2}" type="datetimeFigureOut">
               <a:rPr lang="en-GB" smtClean="0"/>
-              <a:t>09/09/2026</a:t>
+              <a:t>15/09/2026</a:t>
             </a:fld>
             <a:endParaRPr lang="en-GB"/>
           </a:p>
@@ -1110,7 +1110,7 @@
           <a:p>
             <a:fld id="{163DE3BF-E3FE-41CB-9CC8-04CC329604A2}" type="datetimeFigureOut">
               <a:rPr lang="en-GB" smtClean="0"/>
-              <a:t>09/09/2026</a:t>
+              <a:t>15/09/2026</a:t>
             </a:fld>
             <a:endParaRPr lang="en-GB"/>
           </a:p>
@@ -1290,7 +1290,7 @@
           <a:p>
             <a:fld id="{163DE3BF-E3FE-41CB-9CC8-04CC329604A2}" type="datetimeFigureOut">
               <a:rPr lang="en-GB" smtClean="0"/>
-              <a:t>09/09/2026</a:t>
+              <a:t>15/09/2026</a:t>
             </a:fld>
             <a:endParaRPr lang="en-GB"/>
           </a:p>
@@ -1460,7 +1460,7 @@
           <a:p>
             <a:fld id="{163DE3BF-E3FE-41CB-9CC8-04CC329604A2}" type="datetimeFigureOut">
               <a:rPr lang="en-GB" smtClean="0"/>
-              <a:t>09/09/2026</a:t>
+              <a:t>15/09/2026</a:t>
             </a:fld>
             <a:endParaRPr lang="en-GB"/>
           </a:p>
@@ -1706,7 +1706,7 @@
           <a:p>
             <a:fld id="{163DE3BF-E3FE-41CB-9CC8-04CC329604A2}" type="datetimeFigureOut">
               <a:rPr lang="en-GB" smtClean="0"/>
-              <a:t>09/09/2026</a:t>
+              <a:t>15/09/2026</a:t>
             </a:fld>
             <a:endParaRPr lang="en-GB"/>
           </a:p>
@@ -1938,7 +1938,7 @@
           <a:p>
             <a:fld id="{163DE3BF-E3FE-41CB-9CC8-04CC329604A2}" type="datetimeFigureOut">
               <a:rPr lang="en-GB" smtClean="0"/>
-              <a:t>09/09/2026</a:t>
+              <a:t>15/09/2026</a:t>
             </a:fld>
             <a:endParaRPr lang="en-GB"/>
           </a:p>
@@ -2305,7 +2305,7 @@
           <a:p>
             <a:fld id="{163DE3BF-E3FE-41CB-9CC8-04CC329604A2}" type="datetimeFigureOut">
               <a:rPr lang="en-GB" smtClean="0"/>
-              <a:t>09/09/2026</a:t>
+              <a:t>15/09/2026</a:t>
             </a:fld>
             <a:endParaRPr lang="en-GB"/>
           </a:p>
@@ -2423,7 +2423,7 @@
           <a:p>
             <a:fld id="{163DE3BF-E3FE-41CB-9CC8-04CC329604A2}" type="datetimeFigureOut">
               <a:rPr lang="en-GB" smtClean="0"/>
-              <a:t>09/09/2026</a:t>
+              <a:t>15/09/2026</a:t>
             </a:fld>
             <a:endParaRPr lang="en-GB"/>
           </a:p>
@@ -2518,7 +2518,7 @@
           <a:p>
             <a:fld id="{163DE3BF-E3FE-41CB-9CC8-04CC329604A2}" type="datetimeFigureOut">
               <a:rPr lang="en-GB" smtClean="0"/>
-              <a:t>09/09/2026</a:t>
+              <a:t>15/09/2026</a:t>
             </a:fld>
             <a:endParaRPr lang="en-GB"/>
           </a:p>
@@ -2795,7 +2795,7 @@
           <a:p>
             <a:fld id="{163DE3BF-E3FE-41CB-9CC8-04CC329604A2}" type="datetimeFigureOut">
               <a:rPr lang="en-GB" smtClean="0"/>
-              <a:t>09/09/2026</a:t>
+              <a:t>15/09/2026</a:t>
             </a:fld>
             <a:endParaRPr lang="en-GB"/>
           </a:p>
@@ -3052,7 +3052,7 @@
           <a:p>
             <a:fld id="{163DE3BF-E3FE-41CB-9CC8-04CC329604A2}" type="datetimeFigureOut">
               <a:rPr lang="en-GB" smtClean="0"/>
-              <a:t>09/09/2026</a:t>
+              <a:t>15/09/2026</a:t>
             </a:fld>
             <a:endParaRPr lang="en-GB"/>
           </a:p>
@@ -3267,7 +3267,7 @@
             <a:fld id="{163DE3BF-E3FE-41CB-9CC8-04CC329604A2}" type="datetimeFigureOut">
               <a:rPr lang="en-GB" smtClean="0"/>
               <a:pPr/>
-              <a:t>09/09/2026</a:t>
+              <a:t>15/09/2026</a:t>
             </a:fld>
             <a:endParaRPr lang="en-GB" dirty="0"/>
           </a:p>
@@ -3690,7 +3690,7 @@
         <p:spPr>
           <a:xfrm>
             <a:off x="8961120" y="418899"/>
-            <a:ext cx="3230880" cy="1323439"/>
+            <a:ext cx="3230880" cy="1528624"/>
           </a:xfrm>
           <a:prstGeom prst="rect">
             <a:avLst/>
@@ -3802,6 +3802,37 @@
                 <a:latin typeface="Abadi" panose="020B0604020104020204" pitchFamily="34" charset="0"/>
               </a:rPr>
               <a:t>©</a:t>
+            </a:r>
+          </a:p>
+          <a:p>
+            <a:pPr marL="0" marR="0" lvl="0" indent="0" algn="l" defTabSz="457200" rtl="0" eaLnBrk="1" fontAlgn="auto" latinLnBrk="0" hangingPunct="1">
+              <a:lnSpc>
+                <a:spcPct val="100000"/>
+              </a:lnSpc>
+              <a:spcBef>
+                <a:spcPts val="0"/>
+              </a:spcBef>
+              <a:spcAft>
+                <a:spcPts val="0"/>
+              </a:spcAft>
+              <a:buClrTx/>
+              <a:buSzTx/>
+              <a:buFontTx/>
+              <a:buNone/>
+              <a:tabLst/>
+              <a:defRPr/>
+            </a:pPr>
+            <a:r>
+              <a:rPr lang="en-GB" sz="2000" baseline="30000" dirty="0">
+                <a:solidFill>
+                  <a:schemeClr val="tx1">
+                    <a:lumMod val="95000"/>
+                    <a:lumOff val="5000"/>
+                  </a:schemeClr>
+                </a:solidFill>
+                <a:latin typeface="Abadi" panose="020B0604020104020204" pitchFamily="34" charset="0"/>
+              </a:rPr>
+              <a:t>1.9.9.1</a:t>
             </a:r>
           </a:p>
         </p:txBody>
@@ -5416,8 +5447,8 @@
         </p:blipFill>
         <p:spPr>
           <a:xfrm>
-            <a:off x="632956" y="1647412"/>
-            <a:ext cx="6212546" cy="4795908"/>
+            <a:off x="632956" y="1928639"/>
+            <a:ext cx="6212546" cy="4233453"/>
           </a:xfrm>
           <a:prstGeom prst="rect">
             <a:avLst/>
@@ -5699,7 +5730,7 @@
         <p:spPr>
           <a:xfrm>
             <a:off x="7234167" y="1625609"/>
-            <a:ext cx="4620939" cy="2246769"/>
+            <a:ext cx="4620939" cy="1015663"/>
           </a:xfrm>
           <a:prstGeom prst="rect">
             <a:avLst/>
@@ -5729,19 +5760,6 @@
                 <a:latin typeface="Abadi" panose="020B0604020104020204" pitchFamily="34" charset="0"/>
               </a:rPr>
               <a:t> Elements. </a:t>
-            </a:r>
-          </a:p>
-          <a:p>
-            <a:endParaRPr lang="en-GB" sz="2000" dirty="0">
-              <a:latin typeface="Abadi" panose="020B0604020104020204" pitchFamily="34" charset="0"/>
-            </a:endParaRPr>
-          </a:p>
-          <a:p>
-            <a:r>
-              <a:rPr lang="en-GB" sz="2000" dirty="0">
-                <a:latin typeface="Abadi" panose="020B0604020104020204" pitchFamily="34" charset="0"/>
-              </a:rPr>
-              <a:t>Example: if you have Concrete Strength / Steel Type variations within component types, change to:</a:t>
             </a:r>
           </a:p>
         </p:txBody>
@@ -5796,169 +5814,6 @@
           <a:p>
             <a:pPr algn="ctr"/>
             <a:endParaRPr lang="en-GB" dirty="0">
-              <a:latin typeface="Abadi" panose="020B0604020104020204" pitchFamily="34" charset="0"/>
-            </a:endParaRPr>
-          </a:p>
-        </p:txBody>
-      </p:sp>
-      <p:pic>
-        <p:nvPicPr>
-          <p:cNvPr id="6" name="Picture 5">
-            <a:extLst>
-              <a:ext uri="{FF2B5EF4-FFF2-40B4-BE49-F238E27FC236}">
-                <a16:creationId xmlns:a16="http://schemas.microsoft.com/office/drawing/2014/main" id="{01E04DBF-2342-AD2F-4678-A947BC69DDA4}"/>
-              </a:ext>
-            </a:extLst>
-          </p:cNvPr>
-          <p:cNvPicPr>
-            <a:picLocks noChangeAspect="1"/>
-          </p:cNvPicPr>
-          <p:nvPr/>
-        </p:nvPicPr>
-        <p:blipFill>
-          <a:blip r:embed="rId4"/>
-          <a:stretch>
-            <a:fillRect/>
-          </a:stretch>
-        </p:blipFill>
-        <p:spPr>
-          <a:xfrm>
-            <a:off x="7766210" y="3933964"/>
-            <a:ext cx="3330229" cy="845893"/>
-          </a:xfrm>
-          <a:prstGeom prst="rect">
-            <a:avLst/>
-          </a:prstGeom>
-        </p:spPr>
-      </p:pic>
-      <p:cxnSp>
-        <p:nvCxnSpPr>
-          <p:cNvPr id="12" name="Straight Arrow Connector 11">
-            <a:extLst>
-              <a:ext uri="{FF2B5EF4-FFF2-40B4-BE49-F238E27FC236}">
-                <a16:creationId xmlns:a16="http://schemas.microsoft.com/office/drawing/2014/main" id="{9CDEB7BA-7F79-9897-A8EA-47F9124DEA39}"/>
-              </a:ext>
-            </a:extLst>
-          </p:cNvPr>
-          <p:cNvCxnSpPr>
-            <a:cxnSpLocks/>
-            <a:stCxn id="6" idx="1"/>
-          </p:cNvCxnSpPr>
-          <p:nvPr/>
-        </p:nvCxnSpPr>
-        <p:spPr>
-          <a:xfrm flipH="1" flipV="1">
-            <a:off x="6495105" y="3610947"/>
-            <a:ext cx="1271105" cy="745964"/>
-          </a:xfrm>
-          <a:prstGeom prst="straightConnector1">
-            <a:avLst/>
-          </a:prstGeom>
-          <a:ln w="28575">
-            <a:solidFill>
-              <a:srgbClr val="FF0000"/>
-            </a:solidFill>
-            <a:headEnd type="none" w="med" len="med"/>
-            <a:tailEnd type="arrow" w="med" len="med"/>
-          </a:ln>
-        </p:spPr>
-        <p:style>
-          <a:lnRef idx="1">
-            <a:schemeClr val="accent1"/>
-          </a:lnRef>
-          <a:fillRef idx="0">
-            <a:schemeClr val="accent1"/>
-          </a:fillRef>
-          <a:effectRef idx="0">
-            <a:schemeClr val="accent1"/>
-          </a:effectRef>
-          <a:fontRef idx="minor">
-            <a:schemeClr val="tx1"/>
-          </a:fontRef>
-        </p:style>
-      </p:cxnSp>
-      <p:cxnSp>
-        <p:nvCxnSpPr>
-          <p:cNvPr id="14" name="Straight Arrow Connector 13">
-            <a:extLst>
-              <a:ext uri="{FF2B5EF4-FFF2-40B4-BE49-F238E27FC236}">
-                <a16:creationId xmlns:a16="http://schemas.microsoft.com/office/drawing/2014/main" id="{0B2170D2-0DC6-3176-223D-E9636E5CB9E8}"/>
-              </a:ext>
-            </a:extLst>
-          </p:cNvPr>
-          <p:cNvCxnSpPr>
-            <a:cxnSpLocks/>
-          </p:cNvCxnSpPr>
-          <p:nvPr/>
-        </p:nvCxnSpPr>
-        <p:spPr>
-          <a:xfrm flipH="1">
-            <a:off x="1772815" y="5357066"/>
-            <a:ext cx="5682344" cy="368859"/>
-          </a:xfrm>
-          <a:prstGeom prst="straightConnector1">
-            <a:avLst/>
-          </a:prstGeom>
-          <a:ln w="28575">
-            <a:solidFill>
-              <a:srgbClr val="FF0000"/>
-            </a:solidFill>
-            <a:headEnd type="none" w="med" len="med"/>
-            <a:tailEnd type="arrow" w="med" len="med"/>
-          </a:ln>
-        </p:spPr>
-        <p:style>
-          <a:lnRef idx="1">
-            <a:schemeClr val="accent1"/>
-          </a:lnRef>
-          <a:fillRef idx="0">
-            <a:schemeClr val="accent1"/>
-          </a:fillRef>
-          <a:effectRef idx="0">
-            <a:schemeClr val="accent1"/>
-          </a:effectRef>
-          <a:fontRef idx="minor">
-            <a:schemeClr val="tx1"/>
-          </a:fontRef>
-        </p:style>
-      </p:cxnSp>
-      <p:sp>
-        <p:nvSpPr>
-          <p:cNvPr id="16" name="TextBox 15">
-            <a:extLst>
-              <a:ext uri="{FF2B5EF4-FFF2-40B4-BE49-F238E27FC236}">
-                <a16:creationId xmlns:a16="http://schemas.microsoft.com/office/drawing/2014/main" id="{2DE9FFF9-366F-5C4E-572E-D05B821CDA98}"/>
-              </a:ext>
-            </a:extLst>
-          </p:cNvPr>
-          <p:cNvSpPr txBox="1"/>
-          <p:nvPr/>
-        </p:nvSpPr>
-        <p:spPr>
-          <a:xfrm>
-            <a:off x="7466578" y="5041071"/>
-            <a:ext cx="4171409" cy="1323439"/>
-          </a:xfrm>
-          <a:prstGeom prst="rect">
-            <a:avLst/>
-          </a:prstGeom>
-          <a:noFill/>
-        </p:spPr>
-        <p:txBody>
-          <a:bodyPr wrap="square" rtlCol="0">
-            <a:spAutoFit/>
-          </a:bodyPr>
-          <a:lstStyle/>
-          <a:p>
-            <a:r>
-              <a:rPr lang="en-GB" sz="2000" dirty="0">
-                <a:latin typeface="Abadi" panose="020B0604020104020204" pitchFamily="34" charset="0"/>
-              </a:rPr>
-              <a:t>Generic values are default. Update at stage 4/5 once rebar rates are known.</a:t>
-            </a:r>
-          </a:p>
-          <a:p>
-            <a:endParaRPr lang="en-GB" sz="2000" dirty="0">
               <a:latin typeface="Abadi" panose="020B0604020104020204" pitchFamily="34" charset="0"/>
             </a:endParaRPr>
           </a:p>
@@ -6104,7 +5959,7 @@
           <p:nvPr/>
         </p:nvPicPr>
         <p:blipFill>
-          <a:blip r:embed="rId5">
+          <a:blip r:embed="rId4">
             <a:extLst>
               <a:ext uri="{28A0092B-C50C-407E-A947-70E740481C1C}">
                 <a14:useLocalDpi xmlns:a14="http://schemas.microsoft.com/office/drawing/2010/main" val="0"/>
@@ -6188,8 +6043,8 @@
         </p:blipFill>
         <p:spPr>
           <a:xfrm>
-            <a:off x="632956" y="1647412"/>
-            <a:ext cx="6212546" cy="4795908"/>
+            <a:off x="632956" y="1928639"/>
+            <a:ext cx="6212546" cy="4233453"/>
           </a:xfrm>
           <a:prstGeom prst="rect">
             <a:avLst/>
@@ -6694,8 +6549,8 @@
         </p:nvSpPr>
         <p:spPr>
           <a:xfrm flipH="1">
-            <a:off x="725468" y="3234901"/>
-            <a:ext cx="3013761" cy="353688"/>
+            <a:off x="725468" y="2727307"/>
+            <a:ext cx="1972012" cy="409282"/>
           </a:xfrm>
           <a:prstGeom prst="rect">
             <a:avLst/>
@@ -6749,8 +6604,8 @@
         </p:nvSpPr>
         <p:spPr>
           <a:xfrm flipH="1">
-            <a:off x="765033" y="4096183"/>
-            <a:ext cx="2974195" cy="353688"/>
+            <a:off x="765032" y="3165731"/>
+            <a:ext cx="1932448" cy="369332"/>
           </a:xfrm>
           <a:prstGeom prst="rect">
             <a:avLst/>
@@ -6804,8 +6659,8 @@
         </p:nvSpPr>
         <p:spPr>
           <a:xfrm flipH="1">
-            <a:off x="768865" y="5097840"/>
-            <a:ext cx="2970363" cy="794001"/>
+            <a:off x="768862" y="5163433"/>
+            <a:ext cx="1928611" cy="269564"/>
           </a:xfrm>
           <a:prstGeom prst="rect">
             <a:avLst/>
@@ -6859,8 +6714,8 @@
         </p:nvSpPr>
         <p:spPr>
           <a:xfrm flipH="1">
-            <a:off x="3808633" y="2170324"/>
-            <a:ext cx="2974194" cy="710900"/>
+            <a:off x="2744531" y="2115680"/>
+            <a:ext cx="1972800" cy="1764363"/>
           </a:xfrm>
           <a:prstGeom prst="rect">
             <a:avLst/>
@@ -6914,7 +6769,7 @@
         </p:nvSpPr>
         <p:spPr>
           <a:xfrm>
-            <a:off x="368063" y="3234901"/>
+            <a:off x="368063" y="2869604"/>
             <a:ext cx="330540" cy="369332"/>
           </a:xfrm>
           <a:prstGeom prst="rect">
@@ -6954,7 +6809,7 @@
         </p:nvSpPr>
         <p:spPr>
           <a:xfrm>
-            <a:off x="368063" y="4124479"/>
+            <a:off x="386971" y="3298566"/>
             <a:ext cx="330540" cy="369332"/>
           </a:xfrm>
           <a:prstGeom prst="rect">
@@ -6994,7 +6849,7 @@
         </p:nvSpPr>
         <p:spPr>
           <a:xfrm>
-            <a:off x="368063" y="4466192"/>
+            <a:off x="360484" y="4853159"/>
             <a:ext cx="330540" cy="369332"/>
           </a:xfrm>
           <a:prstGeom prst="rect">
@@ -7034,7 +6889,7 @@
         </p:nvSpPr>
         <p:spPr>
           <a:xfrm>
-            <a:off x="6782828" y="1899498"/>
+            <a:off x="4412861" y="2080425"/>
             <a:ext cx="330540" cy="369332"/>
           </a:xfrm>
           <a:prstGeom prst="rect">
@@ -7074,7 +6929,7 @@
         </p:nvSpPr>
         <p:spPr>
           <a:xfrm>
-            <a:off x="6817423" y="2767257"/>
+            <a:off x="4418129" y="3844788"/>
             <a:ext cx="330540" cy="369332"/>
           </a:xfrm>
           <a:prstGeom prst="rect">
@@ -7114,7 +6969,7 @@
         </p:nvSpPr>
         <p:spPr>
           <a:xfrm>
-            <a:off x="6830344" y="3536746"/>
+            <a:off x="4386791" y="4425304"/>
             <a:ext cx="330540" cy="369332"/>
           </a:xfrm>
           <a:prstGeom prst="rect">
@@ -7194,8 +7049,8 @@
         </p:nvSpPr>
         <p:spPr>
           <a:xfrm flipH="1">
-            <a:off x="3808633" y="2877689"/>
-            <a:ext cx="2974194" cy="710900"/>
+            <a:off x="4831467" y="2115681"/>
+            <a:ext cx="1951360" cy="3435696"/>
           </a:xfrm>
           <a:prstGeom prst="rect">
             <a:avLst/>
@@ -7237,10 +7092,255 @@
       </p:sp>
       <p:sp>
         <p:nvSpPr>
-          <p:cNvPr id="28" name="Rectangle 27">
-            <a:extLst>
-              <a:ext uri="{FF2B5EF4-FFF2-40B4-BE49-F238E27FC236}">
-                <a16:creationId xmlns:a16="http://schemas.microsoft.com/office/drawing/2014/main" id="{67714EF4-627D-1733-D4F2-798326090B73}"/>
+          <p:cNvPr id="31" name="TextBox 30">
+            <a:extLst>
+              <a:ext uri="{FF2B5EF4-FFF2-40B4-BE49-F238E27FC236}">
+                <a16:creationId xmlns:a16="http://schemas.microsoft.com/office/drawing/2014/main" id="{F098CC02-99BF-C057-5CB3-58AC2745AEFF}"/>
+              </a:ext>
+            </a:extLst>
+          </p:cNvPr>
+          <p:cNvSpPr txBox="1"/>
+          <p:nvPr/>
+        </p:nvSpPr>
+        <p:spPr>
+          <a:xfrm>
+            <a:off x="6436705" y="2084562"/>
+            <a:ext cx="330540" cy="369332"/>
+          </a:xfrm>
+          <a:prstGeom prst="rect">
+            <a:avLst/>
+          </a:prstGeom>
+          <a:noFill/>
+        </p:spPr>
+        <p:txBody>
+          <a:bodyPr wrap="none" rtlCol="0">
+            <a:spAutoFit/>
+          </a:bodyPr>
+          <a:lstStyle/>
+          <a:p>
+            <a:r>
+              <a:rPr lang="en-GB" b="1" dirty="0">
+                <a:solidFill>
+                  <a:srgbClr val="C00000"/>
+                </a:solidFill>
+                <a:latin typeface="Abadi" panose="020B0604020104020204" pitchFamily="34" charset="0"/>
+              </a:rPr>
+              <a:t>9</a:t>
+            </a:r>
+          </a:p>
+        </p:txBody>
+      </p:sp>
+      <p:sp>
+        <p:nvSpPr>
+          <p:cNvPr id="33" name="TextBox 32">
+            <a:extLst>
+              <a:ext uri="{FF2B5EF4-FFF2-40B4-BE49-F238E27FC236}">
+                <a16:creationId xmlns:a16="http://schemas.microsoft.com/office/drawing/2014/main" id="{9722CAD6-63AA-BCEC-6541-E8CB34638DC9}"/>
+              </a:ext>
+            </a:extLst>
+          </p:cNvPr>
+          <p:cNvSpPr txBox="1"/>
+          <p:nvPr/>
+        </p:nvSpPr>
+        <p:spPr>
+          <a:xfrm>
+            <a:off x="7487728" y="2000821"/>
+            <a:ext cx="4416988" cy="4524315"/>
+          </a:xfrm>
+          <a:prstGeom prst="rect">
+            <a:avLst/>
+          </a:prstGeom>
+          <a:noFill/>
+        </p:spPr>
+        <p:txBody>
+          <a:bodyPr wrap="square" rtlCol="0">
+            <a:spAutoFit/>
+          </a:bodyPr>
+          <a:lstStyle/>
+          <a:p>
+            <a:pPr marL="342900" indent="-342900">
+              <a:buAutoNum type="arabicPeriod"/>
+            </a:pPr>
+            <a:r>
+              <a:rPr lang="en-GB" sz="1200" dirty="0">
+                <a:latin typeface="Abadi" panose="020B0604020104020204" pitchFamily="34" charset="0"/>
+              </a:rPr>
+              <a:t>Select a database where </a:t>
+            </a:r>
+            <a:r>
+              <a:rPr lang="en-GB" sz="1200" dirty="0" err="1">
+                <a:latin typeface="Abadi" panose="020B0604020104020204" pitchFamily="34" charset="0"/>
+              </a:rPr>
+              <a:t>CarboLife</a:t>
+            </a:r>
+            <a:r>
+              <a:rPr lang="en-GB" sz="1200" dirty="0">
+                <a:latin typeface="Abadi" panose="020B0604020104020204" pitchFamily="34" charset="0"/>
+              </a:rPr>
+              <a:t> will pick it’s embodied </a:t>
+            </a:r>
+            <a:r>
+              <a:rPr lang="en-GB" sz="1200" b="1" dirty="0">
+                <a:latin typeface="Abadi" panose="020B0604020104020204" pitchFamily="34" charset="0"/>
+              </a:rPr>
+              <a:t>carbon material values </a:t>
+            </a:r>
+            <a:r>
+              <a:rPr lang="en-GB" sz="1200" dirty="0">
+                <a:latin typeface="Abadi" panose="020B0604020104020204" pitchFamily="34" charset="0"/>
+              </a:rPr>
+              <a:t>from. This can be a *. </a:t>
+            </a:r>
+            <a:r>
+              <a:rPr lang="en-GB" sz="1200" dirty="0" err="1">
+                <a:latin typeface="Abadi" panose="020B0604020104020204" pitchFamily="34" charset="0"/>
+              </a:rPr>
+              <a:t>Cxml</a:t>
+            </a:r>
+            <a:r>
+              <a:rPr lang="en-GB" sz="1200" dirty="0">
+                <a:latin typeface="Abadi" panose="020B0604020104020204" pitchFamily="34" charset="0"/>
+              </a:rPr>
+              <a:t> (template) file or *.csv</a:t>
+            </a:r>
+          </a:p>
+          <a:p>
+            <a:pPr marL="342900" indent="-342900">
+              <a:buAutoNum type="arabicPeriod"/>
+            </a:pPr>
+            <a:r>
+              <a:rPr lang="en-GB" sz="1200" b="1" dirty="0">
+                <a:latin typeface="Abadi" panose="020B0604020104020204" pitchFamily="34" charset="0"/>
+              </a:rPr>
+              <a:t>The element’s categories </a:t>
+            </a:r>
+            <a:r>
+              <a:rPr lang="en-GB" sz="1200" dirty="0">
+                <a:latin typeface="Abadi" panose="020B0604020104020204" pitchFamily="34" charset="0"/>
+              </a:rPr>
+              <a:t>are taken from the Revit Category, you can override this value for a parameter</a:t>
+            </a:r>
+          </a:p>
+          <a:p>
+            <a:pPr marL="342900" indent="-342900">
+              <a:buAutoNum type="arabicPeriod"/>
+            </a:pPr>
+            <a:r>
+              <a:rPr lang="en-GB" sz="1200" dirty="0">
+                <a:latin typeface="Abadi" panose="020B0604020104020204" pitchFamily="34" charset="0"/>
+              </a:rPr>
+              <a:t>Specify an uncertainty factor, as per RICS and </a:t>
+            </a:r>
+            <a:r>
+              <a:rPr lang="en-GB" sz="1200" dirty="0" err="1">
+                <a:latin typeface="Abadi" panose="020B0604020104020204" pitchFamily="34" charset="0"/>
+              </a:rPr>
+              <a:t>IstructE’s</a:t>
+            </a:r>
+            <a:r>
+              <a:rPr lang="en-GB" sz="1200" dirty="0">
+                <a:latin typeface="Abadi" panose="020B0604020104020204" pitchFamily="34" charset="0"/>
+              </a:rPr>
+              <a:t> Guidelines.</a:t>
+            </a:r>
+          </a:p>
+          <a:p>
+            <a:pPr marL="342900" indent="-342900">
+              <a:buAutoNum type="arabicPeriod"/>
+            </a:pPr>
+            <a:r>
+              <a:rPr lang="en-GB" sz="1200" dirty="0">
+                <a:latin typeface="Abadi" panose="020B0604020104020204" pitchFamily="34" charset="0"/>
+              </a:rPr>
+              <a:t>Specify the locations of the material libraries and mapping file if you want to share this with the company.</a:t>
+            </a:r>
+          </a:p>
+          <a:p>
+            <a:pPr marL="342900" indent="-342900">
+              <a:buAutoNum type="arabicPeriod"/>
+            </a:pPr>
+            <a:r>
+              <a:rPr lang="en-GB" sz="1200" dirty="0">
+                <a:latin typeface="Abadi" panose="020B0604020104020204" pitchFamily="34" charset="0"/>
+              </a:rPr>
+              <a:t>Confirm if you want to map your model based on previous mapping settings.</a:t>
+            </a:r>
+          </a:p>
+          <a:p>
+            <a:pPr marL="342900" indent="-342900">
+              <a:buAutoNum type="arabicPeriod"/>
+            </a:pPr>
+            <a:r>
+              <a:rPr lang="en-GB" sz="1200" dirty="0">
+                <a:latin typeface="Abadi" panose="020B0604020104020204" pitchFamily="34" charset="0"/>
+              </a:rPr>
+              <a:t>Various Parameters can be used to finetune the import process, substructure, Material Grades, Or a volume correction parameter.</a:t>
+            </a:r>
+          </a:p>
+          <a:p>
+            <a:pPr marL="342900" indent="-342900">
+              <a:buFontTx/>
+              <a:buAutoNum type="arabicPeriod"/>
+            </a:pPr>
+            <a:r>
+              <a:rPr lang="en-GB" sz="1200" dirty="0">
+                <a:latin typeface="Abadi" panose="020B0604020104020204" pitchFamily="34" charset="0"/>
+              </a:rPr>
+              <a:t>If </a:t>
+            </a:r>
+            <a:r>
+              <a:rPr lang="en-GB" sz="1200" b="1" dirty="0">
+                <a:latin typeface="Abadi" panose="020B0604020104020204" pitchFamily="34" charset="0"/>
+              </a:rPr>
+              <a:t>existing or demolished elements </a:t>
+            </a:r>
+            <a:r>
+              <a:rPr lang="en-GB" sz="1200" dirty="0">
+                <a:latin typeface="Abadi" panose="020B0604020104020204" pitchFamily="34" charset="0"/>
+              </a:rPr>
+              <a:t>need to be extracted make sure these are set</a:t>
+            </a:r>
+          </a:p>
+          <a:p>
+            <a:pPr marL="342900" indent="-342900">
+              <a:buAutoNum type="arabicPeriod"/>
+            </a:pPr>
+            <a:r>
+              <a:rPr lang="en-GB" sz="1200" dirty="0">
+                <a:latin typeface="Abadi" panose="020B0604020104020204" pitchFamily="34" charset="0"/>
+              </a:rPr>
+              <a:t>You can define the GIA’s in the Revit Model and the importer will use these, if not the importer will make an estimation.</a:t>
+            </a:r>
+          </a:p>
+          <a:p>
+            <a:pPr marL="342900" indent="-342900">
+              <a:buAutoNum type="arabicPeriod"/>
+            </a:pPr>
+            <a:r>
+              <a:rPr lang="en-GB" sz="1200" dirty="0">
+                <a:latin typeface="Abadi" panose="020B0604020104020204" pitchFamily="34" charset="0"/>
+              </a:rPr>
+              <a:t>Various structural elements which typically are not modelled in early stages can be added automatically: Reinforcement, Steel Connections, and Timber Connections. </a:t>
+            </a:r>
+          </a:p>
+          <a:p>
+            <a:endParaRPr lang="en-GB" sz="1200" b="1" dirty="0">
+              <a:latin typeface="Abadi" panose="020B0604020104020204" pitchFamily="34" charset="0"/>
+            </a:endParaRPr>
+          </a:p>
+          <a:p>
+            <a:endParaRPr lang="en-GB" sz="1200" dirty="0">
+              <a:latin typeface="Abadi" panose="020B0604020104020204" pitchFamily="34" charset="0"/>
+            </a:endParaRPr>
+          </a:p>
+        </p:txBody>
+      </p:sp>
+      <p:sp>
+        <p:nvSpPr>
+          <p:cNvPr id="34" name="Rectangle 33">
+            <a:extLst>
+              <a:ext uri="{FF2B5EF4-FFF2-40B4-BE49-F238E27FC236}">
+                <a16:creationId xmlns:a16="http://schemas.microsoft.com/office/drawing/2014/main" id="{C4AA12DC-0B57-E001-A27E-7B8976F60B5C}"/>
               </a:ext>
             </a:extLst>
           </p:cNvPr>
@@ -7248,9 +7348,96 @@
           <p:nvPr/>
         </p:nvSpPr>
         <p:spPr>
+          <a:xfrm>
+            <a:off x="6669988" y="1640817"/>
+            <a:ext cx="2170981" cy="1323439"/>
+          </a:xfrm>
+          <a:prstGeom prst="rect">
+            <a:avLst/>
+          </a:prstGeom>
+        </p:spPr>
+        <p:txBody>
+          <a:bodyPr wrap="square">
+            <a:spAutoFit/>
+          </a:bodyPr>
+          <a:lstStyle/>
+          <a:p>
+            <a:pPr algn="ctr"/>
+            <a:r>
+              <a:rPr lang="en-GB" sz="2000" b="1" dirty="0">
+                <a:solidFill>
+                  <a:schemeClr val="tx1">
+                    <a:lumMod val="95000"/>
+                    <a:lumOff val="5000"/>
+                  </a:schemeClr>
+                </a:solidFill>
+                <a:effectLst/>
+                <a:latin typeface="Abadi" panose="020B0604020104020204" pitchFamily="34" charset="0"/>
+              </a:rPr>
+              <a:t>Key</a:t>
+            </a:r>
+          </a:p>
+          <a:p>
+            <a:pPr marL="742950" lvl="1" indent="-285750" algn="ctr">
+              <a:buFont typeface="Arial" panose="020B0604020202020204" pitchFamily="34" charset="0"/>
+              <a:buChar char="•"/>
+            </a:pPr>
+            <a:endParaRPr lang="en-GB" sz="2000" b="1" dirty="0">
+              <a:solidFill>
+                <a:schemeClr val="tx1">
+                  <a:lumMod val="95000"/>
+                  <a:lumOff val="5000"/>
+                </a:schemeClr>
+              </a:solidFill>
+              <a:latin typeface="Abadi" panose="020B0604020104020204" pitchFamily="34" charset="0"/>
+            </a:endParaRPr>
+          </a:p>
+          <a:p>
+            <a:pPr marL="285750" indent="-285750" algn="ctr">
+              <a:buFont typeface="Arial" panose="020B0604020202020204" pitchFamily="34" charset="0"/>
+              <a:buChar char="•"/>
+            </a:pPr>
+            <a:endParaRPr lang="en-GB" sz="2000" b="1" dirty="0">
+              <a:solidFill>
+                <a:schemeClr val="tx1">
+                  <a:lumMod val="95000"/>
+                  <a:lumOff val="5000"/>
+                </a:schemeClr>
+              </a:solidFill>
+              <a:latin typeface="Abadi" panose="020B0604020104020204" pitchFamily="34" charset="0"/>
+            </a:endParaRPr>
+          </a:p>
+          <a:p>
+            <a:pPr algn="ctr"/>
+            <a:endParaRPr lang="en-GB" sz="2000" b="1" dirty="0">
+              <a:solidFill>
+                <a:schemeClr val="tx1">
+                  <a:lumMod val="95000"/>
+                  <a:lumOff val="5000"/>
+                </a:schemeClr>
+              </a:solidFill>
+              <a:effectLst/>
+              <a:latin typeface="Abadi" panose="020B0604020104020204" pitchFamily="34" charset="0"/>
+            </a:endParaRPr>
+          </a:p>
+        </p:txBody>
+      </p:sp>
+      <p:sp>
+        <p:nvSpPr>
+          <p:cNvPr id="35" name="Rectangle 34">
+            <a:extLst>
+              <a:ext uri="{FF2B5EF4-FFF2-40B4-BE49-F238E27FC236}">
+                <a16:creationId xmlns:a16="http://schemas.microsoft.com/office/drawing/2014/main" id="{B9A9DC38-509A-ECDF-8592-100C85A19A4F}"/>
+              </a:ext>
+            </a:extLst>
+          </p:cNvPr>
+          <p:cNvSpPr/>
+          <p:nvPr/>
+        </p:nvSpPr>
+        <p:spPr>
           <a:xfrm flipH="1">
-            <a:off x="3808633" y="3585054"/>
-            <a:ext cx="2974194" cy="710900"/>
+            <a:off x="5869717" y="5926537"/>
+            <a:ext cx="947705" cy="231499"/>
           </a:xfrm>
           <a:prstGeom prst="rect">
             <a:avLst/>
@@ -7292,10 +7479,10 @@
       </p:sp>
       <p:sp>
         <p:nvSpPr>
-          <p:cNvPr id="29" name="Rectangle 28">
-            <a:extLst>
-              <a:ext uri="{FF2B5EF4-FFF2-40B4-BE49-F238E27FC236}">
-                <a16:creationId xmlns:a16="http://schemas.microsoft.com/office/drawing/2014/main" id="{DEEDF892-429B-549E-237B-34B5750E7590}"/>
+          <p:cNvPr id="37" name="Rectangle 36">
+            <a:extLst>
+              <a:ext uri="{FF2B5EF4-FFF2-40B4-BE49-F238E27FC236}">
+                <a16:creationId xmlns:a16="http://schemas.microsoft.com/office/drawing/2014/main" id="{765811BF-7BC5-B9F3-E525-A1561C0D2C6B}"/>
               </a:ext>
             </a:extLst>
           </p:cNvPr>
@@ -7304,8 +7491,8 @@
         </p:nvSpPr>
         <p:spPr>
           <a:xfrm flipH="1">
-            <a:off x="3808633" y="4292418"/>
-            <a:ext cx="2974194" cy="918495"/>
+            <a:off x="725467" y="2166789"/>
+            <a:ext cx="1972006" cy="560518"/>
           </a:xfrm>
           <a:prstGeom prst="rect">
             <a:avLst/>
@@ -7347,10 +7534,50 @@
       </p:sp>
       <p:sp>
         <p:nvSpPr>
-          <p:cNvPr id="30" name="Rectangle 29">
-            <a:extLst>
-              <a:ext uri="{FF2B5EF4-FFF2-40B4-BE49-F238E27FC236}">
-                <a16:creationId xmlns:a16="http://schemas.microsoft.com/office/drawing/2014/main" id="{16EBF3D9-104D-6EF1-D332-1A51FE27A9EA}"/>
+          <p:cNvPr id="38" name="TextBox 37">
+            <a:extLst>
+              <a:ext uri="{FF2B5EF4-FFF2-40B4-BE49-F238E27FC236}">
+                <a16:creationId xmlns:a16="http://schemas.microsoft.com/office/drawing/2014/main" id="{B62491A7-5E51-B460-3BAA-DDA8F3089CF5}"/>
+              </a:ext>
+            </a:extLst>
+          </p:cNvPr>
+          <p:cNvSpPr txBox="1"/>
+          <p:nvPr/>
+        </p:nvSpPr>
+        <p:spPr>
+          <a:xfrm>
+            <a:off x="5425439" y="6111203"/>
+            <a:ext cx="1456745" cy="369332"/>
+          </a:xfrm>
+          <a:prstGeom prst="rect">
+            <a:avLst/>
+          </a:prstGeom>
+          <a:noFill/>
+        </p:spPr>
+        <p:txBody>
+          <a:bodyPr wrap="none" rtlCol="0">
+            <a:spAutoFit/>
+          </a:bodyPr>
+          <a:lstStyle/>
+          <a:p>
+            <a:r>
+              <a:rPr lang="en-GB" b="1" dirty="0">
+                <a:solidFill>
+                  <a:srgbClr val="C00000"/>
+                </a:solidFill>
+                <a:latin typeface="Abadi" panose="020B0604020104020204" pitchFamily="34" charset="0"/>
+              </a:rPr>
+              <a:t>Start Import</a:t>
+            </a:r>
+          </a:p>
+        </p:txBody>
+      </p:sp>
+      <p:sp>
+        <p:nvSpPr>
+          <p:cNvPr id="2" name="Rectangle 1">
+            <a:extLst>
+              <a:ext uri="{FF2B5EF4-FFF2-40B4-BE49-F238E27FC236}">
+                <a16:creationId xmlns:a16="http://schemas.microsoft.com/office/drawing/2014/main" id="{1F85017C-92DA-06D5-F592-0A5D0A94C8F8}"/>
               </a:ext>
             </a:extLst>
           </p:cNvPr>
@@ -7359,8 +7586,8 @@
         </p:nvSpPr>
         <p:spPr>
           <a:xfrm flipH="1">
-            <a:off x="3808633" y="5210914"/>
-            <a:ext cx="2974194" cy="680926"/>
+            <a:off x="765028" y="3564204"/>
+            <a:ext cx="1932447" cy="1580971"/>
           </a:xfrm>
           <a:prstGeom prst="rect">
             <a:avLst/>
@@ -7402,10 +7629,10 @@
       </p:sp>
       <p:sp>
         <p:nvSpPr>
-          <p:cNvPr id="31" name="TextBox 30">
-            <a:extLst>
-              <a:ext uri="{FF2B5EF4-FFF2-40B4-BE49-F238E27FC236}">
-                <a16:creationId xmlns:a16="http://schemas.microsoft.com/office/drawing/2014/main" id="{F098CC02-99BF-C057-5CB3-58AC2745AEFF}"/>
+          <p:cNvPr id="4" name="TextBox 3">
+            <a:extLst>
+              <a:ext uri="{FF2B5EF4-FFF2-40B4-BE49-F238E27FC236}">
+                <a16:creationId xmlns:a16="http://schemas.microsoft.com/office/drawing/2014/main" id="{09DAADF2-5275-8F3B-2F58-FDD941DA77DB}"/>
               </a:ext>
             </a:extLst>
           </p:cNvPr>
@@ -7414,7 +7641,7 @@
         </p:nvSpPr>
         <p:spPr>
           <a:xfrm>
-            <a:off x="6837923" y="4217098"/>
+            <a:off x="368063" y="5182045"/>
             <a:ext cx="330540" cy="369332"/>
           </a:xfrm>
           <a:prstGeom prst="rect">
@@ -7435,345 +7662,17 @@
                 </a:solidFill>
                 <a:latin typeface="Abadi" panose="020B0604020104020204" pitchFamily="34" charset="0"/>
               </a:rPr>
-              <a:t>9</a:t>
-            </a:r>
-          </a:p>
-        </p:txBody>
-      </p:sp>
-      <p:sp>
-        <p:nvSpPr>
-          <p:cNvPr id="32" name="TextBox 31">
-            <a:extLst>
-              <a:ext uri="{FF2B5EF4-FFF2-40B4-BE49-F238E27FC236}">
-                <a16:creationId xmlns:a16="http://schemas.microsoft.com/office/drawing/2014/main" id="{07A09268-0907-F2AC-7AC6-E0CCDBA7F97E}"/>
-              </a:ext>
-            </a:extLst>
-          </p:cNvPr>
-          <p:cNvSpPr txBox="1"/>
-          <p:nvPr/>
-        </p:nvSpPr>
-        <p:spPr>
-          <a:xfrm>
-            <a:off x="6845502" y="5163433"/>
-            <a:ext cx="418704" cy="369332"/>
-          </a:xfrm>
-          <a:prstGeom prst="rect">
-            <a:avLst/>
-          </a:prstGeom>
-          <a:noFill/>
-        </p:spPr>
-        <p:txBody>
-          <a:bodyPr wrap="none" rtlCol="0">
-            <a:spAutoFit/>
-          </a:bodyPr>
-          <a:lstStyle/>
-          <a:p>
-            <a:r>
-              <a:rPr lang="en-GB" b="1" dirty="0">
-                <a:solidFill>
-                  <a:srgbClr val="C00000"/>
-                </a:solidFill>
-                <a:latin typeface="Abadi" panose="020B0604020104020204" pitchFamily="34" charset="0"/>
-              </a:rPr>
-              <a:t>10</a:t>
-            </a:r>
-          </a:p>
-        </p:txBody>
-      </p:sp>
-      <p:sp>
-        <p:nvSpPr>
-          <p:cNvPr id="33" name="TextBox 32">
-            <a:extLst>
-              <a:ext uri="{FF2B5EF4-FFF2-40B4-BE49-F238E27FC236}">
-                <a16:creationId xmlns:a16="http://schemas.microsoft.com/office/drawing/2014/main" id="{9722CAD6-63AA-BCEC-6541-E8CB34638DC9}"/>
-              </a:ext>
-            </a:extLst>
-          </p:cNvPr>
-          <p:cNvSpPr txBox="1"/>
-          <p:nvPr/>
-        </p:nvSpPr>
-        <p:spPr>
-          <a:xfrm>
-            <a:off x="7487728" y="2000821"/>
-            <a:ext cx="4416988" cy="4616648"/>
-          </a:xfrm>
-          <a:prstGeom prst="rect">
-            <a:avLst/>
-          </a:prstGeom>
-          <a:noFill/>
-        </p:spPr>
-        <p:txBody>
-          <a:bodyPr wrap="square" rtlCol="0">
-            <a:spAutoFit/>
-          </a:bodyPr>
-          <a:lstStyle/>
-          <a:p>
-            <a:pPr marL="342900" indent="-342900">
-              <a:buFont typeface="+mj-lt"/>
-              <a:buAutoNum type="arabicPeriod"/>
-            </a:pPr>
-            <a:r>
-              <a:rPr lang="en-GB" sz="1400" dirty="0">
-                <a:latin typeface="Abadi" panose="020B0604020104020204" pitchFamily="34" charset="0"/>
-              </a:rPr>
-              <a:t>Select an existing project file to </a:t>
-            </a:r>
-            <a:r>
-              <a:rPr lang="en-GB" sz="1400" b="1" dirty="0">
-                <a:latin typeface="Abadi" panose="020B0604020104020204" pitchFamily="34" charset="0"/>
-              </a:rPr>
-              <a:t>update a project.</a:t>
-            </a:r>
-          </a:p>
-          <a:p>
-            <a:pPr marL="342900" indent="-342900">
-              <a:buAutoNum type="arabicPeriod"/>
-            </a:pPr>
-            <a:r>
-              <a:rPr lang="en-GB" sz="1400" dirty="0">
-                <a:latin typeface="Abadi" panose="020B0604020104020204" pitchFamily="34" charset="0"/>
-              </a:rPr>
-              <a:t>Select a database where </a:t>
-            </a:r>
-            <a:r>
-              <a:rPr lang="en-GB" sz="1400" dirty="0" err="1">
-                <a:latin typeface="Abadi" panose="020B0604020104020204" pitchFamily="34" charset="0"/>
-              </a:rPr>
-              <a:t>CarboLife</a:t>
-            </a:r>
-            <a:r>
-              <a:rPr lang="en-GB" sz="1400" dirty="0">
-                <a:latin typeface="Abadi" panose="020B0604020104020204" pitchFamily="34" charset="0"/>
-              </a:rPr>
-              <a:t> will pick it’s embodied </a:t>
-            </a:r>
-            <a:r>
-              <a:rPr lang="en-GB" sz="1400" b="1" dirty="0">
-                <a:latin typeface="Abadi" panose="020B0604020104020204" pitchFamily="34" charset="0"/>
-              </a:rPr>
-              <a:t>carbon material values </a:t>
-            </a:r>
-            <a:r>
-              <a:rPr lang="en-GB" sz="1400" dirty="0">
-                <a:latin typeface="Abadi" panose="020B0604020104020204" pitchFamily="34" charset="0"/>
-              </a:rPr>
-              <a:t>from. This can be a *. </a:t>
-            </a:r>
-            <a:r>
-              <a:rPr lang="en-GB" sz="1400" dirty="0" err="1">
-                <a:latin typeface="Abadi" panose="020B0604020104020204" pitchFamily="34" charset="0"/>
-              </a:rPr>
-              <a:t>Cxml</a:t>
-            </a:r>
-            <a:r>
-              <a:rPr lang="en-GB" sz="1400" dirty="0">
-                <a:latin typeface="Abadi" panose="020B0604020104020204" pitchFamily="34" charset="0"/>
-              </a:rPr>
-              <a:t> (template) file or *.csv</a:t>
-            </a:r>
-          </a:p>
-          <a:p>
-            <a:pPr marL="342900" indent="-342900">
-              <a:buAutoNum type="arabicPeriod"/>
-            </a:pPr>
-            <a:r>
-              <a:rPr lang="en-GB" sz="1400" b="1" dirty="0">
-                <a:latin typeface="Abadi" panose="020B0604020104020204" pitchFamily="34" charset="0"/>
-              </a:rPr>
-              <a:t>The element’s categories </a:t>
-            </a:r>
-            <a:r>
-              <a:rPr lang="en-GB" sz="1400" dirty="0">
-                <a:latin typeface="Abadi" panose="020B0604020104020204" pitchFamily="34" charset="0"/>
-              </a:rPr>
-              <a:t>are taken from the Revit Category, you can override this value for a parameter</a:t>
-            </a:r>
-          </a:p>
-          <a:p>
-            <a:pPr marL="342900" indent="-342900">
-              <a:buAutoNum type="arabicPeriod"/>
-            </a:pPr>
-            <a:r>
-              <a:rPr lang="en-GB" sz="1400" dirty="0">
-                <a:latin typeface="Abadi" panose="020B0604020104020204" pitchFamily="34" charset="0"/>
-              </a:rPr>
-              <a:t>Specify an uncertainty factor, as per RICS and </a:t>
-            </a:r>
-            <a:r>
-              <a:rPr lang="en-GB" sz="1400" dirty="0" err="1">
-                <a:latin typeface="Abadi" panose="020B0604020104020204" pitchFamily="34" charset="0"/>
-              </a:rPr>
-              <a:t>IstructE’s</a:t>
-            </a:r>
-            <a:r>
-              <a:rPr lang="en-GB" sz="1400" dirty="0">
-                <a:latin typeface="Abadi" panose="020B0604020104020204" pitchFamily="34" charset="0"/>
-              </a:rPr>
-              <a:t> Guidelines.</a:t>
-            </a:r>
-          </a:p>
-          <a:p>
-            <a:pPr marL="342900" indent="-342900">
-              <a:buAutoNum type="arabicPeriod"/>
-            </a:pPr>
-            <a:r>
-              <a:rPr lang="en-GB" sz="1400" dirty="0">
-                <a:latin typeface="Abadi" panose="020B0604020104020204" pitchFamily="34" charset="0"/>
-              </a:rPr>
-              <a:t>Check if you want to automatically </a:t>
-            </a:r>
-            <a:r>
-              <a:rPr lang="en-GB" sz="1400" b="1" dirty="0">
-                <a:latin typeface="Abadi" panose="020B0604020104020204" pitchFamily="34" charset="0"/>
-              </a:rPr>
-              <a:t>generate</a:t>
-            </a:r>
-            <a:r>
-              <a:rPr lang="en-GB" sz="1400" dirty="0">
-                <a:latin typeface="Abadi" panose="020B0604020104020204" pitchFamily="34" charset="0"/>
-              </a:rPr>
-              <a:t> </a:t>
-            </a:r>
-            <a:r>
-              <a:rPr lang="en-GB" sz="1400" b="1" dirty="0">
-                <a:latin typeface="Abadi" panose="020B0604020104020204" pitchFamily="34" charset="0"/>
-              </a:rPr>
-              <a:t>reinforcement</a:t>
-            </a:r>
-            <a:r>
-              <a:rPr lang="en-GB" sz="1400" dirty="0">
-                <a:latin typeface="Abadi" panose="020B0604020104020204" pitchFamily="34" charset="0"/>
-              </a:rPr>
-              <a:t> values</a:t>
-            </a:r>
-          </a:p>
-          <a:p>
-            <a:pPr marL="342900" indent="-342900">
-              <a:buAutoNum type="arabicPeriod"/>
-            </a:pPr>
-            <a:r>
-              <a:rPr lang="en-GB" sz="1400" dirty="0">
-                <a:latin typeface="Abadi" panose="020B0604020104020204" pitchFamily="34" charset="0"/>
-              </a:rPr>
-              <a:t>Define which property defines </a:t>
-            </a:r>
-            <a:r>
-              <a:rPr lang="en-GB" sz="1400" b="1" dirty="0">
-                <a:latin typeface="Abadi" panose="020B0604020104020204" pitchFamily="34" charset="0"/>
-              </a:rPr>
-              <a:t>substructures</a:t>
-            </a:r>
-          </a:p>
-          <a:p>
-            <a:pPr marL="342900" indent="-342900">
-              <a:buAutoNum type="arabicPeriod"/>
-            </a:pPr>
-            <a:r>
-              <a:rPr lang="en-GB" sz="1400" dirty="0">
-                <a:latin typeface="Abadi" panose="020B0604020104020204" pitchFamily="34" charset="0"/>
-              </a:rPr>
-              <a:t>Assign this value to better group </a:t>
-            </a:r>
-            <a:r>
-              <a:rPr lang="en-GB" sz="1400" b="1" dirty="0">
-                <a:latin typeface="Abadi" panose="020B0604020104020204" pitchFamily="34" charset="0"/>
-              </a:rPr>
-              <a:t>different grades</a:t>
-            </a:r>
-          </a:p>
-          <a:p>
-            <a:pPr marL="342900" indent="-342900">
-              <a:buAutoNum type="arabicPeriod"/>
-            </a:pPr>
-            <a:r>
-              <a:rPr lang="en-GB" sz="1400" dirty="0">
-                <a:latin typeface="Abadi" panose="020B0604020104020204" pitchFamily="34" charset="0"/>
-              </a:rPr>
-              <a:t>Certain elements’ volumes do not match their actual, a </a:t>
-            </a:r>
-            <a:r>
-              <a:rPr lang="en-GB" sz="1400" b="1" dirty="0">
-                <a:latin typeface="Abadi" panose="020B0604020104020204" pitchFamily="34" charset="0"/>
-              </a:rPr>
-              <a:t>correction</a:t>
-            </a:r>
-            <a:r>
-              <a:rPr lang="en-GB" sz="1400" dirty="0">
-                <a:latin typeface="Abadi" panose="020B0604020104020204" pitchFamily="34" charset="0"/>
-              </a:rPr>
-              <a:t> can fix this: </a:t>
-            </a:r>
-            <a:br>
-              <a:rPr lang="en-GB" sz="1400" dirty="0">
-                <a:latin typeface="Abadi" panose="020B0604020104020204" pitchFamily="34" charset="0"/>
-              </a:rPr>
-            </a:br>
-            <a:r>
-              <a:rPr lang="en-GB" sz="1400" dirty="0">
-                <a:latin typeface="Abadi" panose="020B0604020104020204" pitchFamily="34" charset="0"/>
-              </a:rPr>
-              <a:t>The format would be “*.8” without quotes</a:t>
-            </a:r>
-          </a:p>
-          <a:p>
-            <a:pPr marL="342900" indent="-342900">
-              <a:buAutoNum type="arabicPeriod"/>
-            </a:pPr>
-            <a:r>
-              <a:rPr lang="en-GB" sz="1400" dirty="0">
-                <a:latin typeface="Abadi" panose="020B0604020104020204" pitchFamily="34" charset="0"/>
-              </a:rPr>
-              <a:t>If </a:t>
-            </a:r>
-            <a:r>
-              <a:rPr lang="en-GB" sz="1400" b="1" dirty="0">
-                <a:latin typeface="Abadi" panose="020B0604020104020204" pitchFamily="34" charset="0"/>
-              </a:rPr>
-              <a:t>existing or demolished elements </a:t>
-            </a:r>
-            <a:r>
-              <a:rPr lang="en-GB" sz="1400" dirty="0">
-                <a:latin typeface="Abadi" panose="020B0604020104020204" pitchFamily="34" charset="0"/>
-              </a:rPr>
-              <a:t>need to be extracted make sure these are checked</a:t>
-            </a:r>
-          </a:p>
-          <a:p>
-            <a:pPr marL="342900" indent="-342900">
-              <a:buAutoNum type="arabicPeriod"/>
-            </a:pPr>
-            <a:r>
-              <a:rPr lang="en-GB" sz="1400" dirty="0">
-                <a:latin typeface="Abadi" panose="020B0604020104020204" pitchFamily="34" charset="0"/>
-              </a:rPr>
-              <a:t>If you would like to extract &amp; group </a:t>
-            </a:r>
-            <a:r>
-              <a:rPr lang="en-GB" sz="1400" b="1" dirty="0">
-                <a:latin typeface="Abadi" panose="020B0604020104020204" pitchFamily="34" charset="0"/>
-              </a:rPr>
-              <a:t>any other parameter </a:t>
-            </a:r>
-            <a:r>
-              <a:rPr lang="en-GB" sz="1400" dirty="0">
-                <a:latin typeface="Abadi" panose="020B0604020104020204" pitchFamily="34" charset="0"/>
-              </a:rPr>
-              <a:t>make sure to fill this in.</a:t>
-            </a:r>
-          </a:p>
-          <a:p>
-            <a:endParaRPr lang="en-GB" sz="1400" dirty="0">
-              <a:latin typeface="Abadi" panose="020B0604020104020204" pitchFamily="34" charset="0"/>
-            </a:endParaRPr>
-          </a:p>
-        </p:txBody>
-      </p:sp>
-      <p:sp>
-        <p:nvSpPr>
-          <p:cNvPr id="34" name="Rectangle 33">
-            <a:extLst>
-              <a:ext uri="{FF2B5EF4-FFF2-40B4-BE49-F238E27FC236}">
-                <a16:creationId xmlns:a16="http://schemas.microsoft.com/office/drawing/2014/main" id="{C4AA12DC-0B57-E001-A27E-7B8976F60B5C}"/>
+              <a:t>5</a:t>
+            </a:r>
+          </a:p>
+        </p:txBody>
+      </p:sp>
+      <p:sp>
+        <p:nvSpPr>
+          <p:cNvPr id="11" name="Rectangle 10">
+            <a:extLst>
+              <a:ext uri="{FF2B5EF4-FFF2-40B4-BE49-F238E27FC236}">
+                <a16:creationId xmlns:a16="http://schemas.microsoft.com/office/drawing/2014/main" id="{1C30C733-218D-F388-8B69-5ABDBE365DAC}"/>
               </a:ext>
             </a:extLst>
           </p:cNvPr>
@@ -7781,96 +7680,9 @@
           <p:nvPr/>
         </p:nvSpPr>
         <p:spPr>
-          <a:xfrm>
-            <a:off x="6669988" y="1640817"/>
-            <a:ext cx="2170981" cy="1323439"/>
-          </a:xfrm>
-          <a:prstGeom prst="rect">
-            <a:avLst/>
-          </a:prstGeom>
-        </p:spPr>
-        <p:txBody>
-          <a:bodyPr wrap="square">
-            <a:spAutoFit/>
-          </a:bodyPr>
-          <a:lstStyle/>
-          <a:p>
-            <a:pPr algn="ctr"/>
-            <a:r>
-              <a:rPr lang="en-GB" sz="2000" b="1" dirty="0">
-                <a:solidFill>
-                  <a:schemeClr val="tx1">
-                    <a:lumMod val="95000"/>
-                    <a:lumOff val="5000"/>
-                  </a:schemeClr>
-                </a:solidFill>
-                <a:effectLst/>
-                <a:latin typeface="Abadi" panose="020B0604020104020204" pitchFamily="34" charset="0"/>
-              </a:rPr>
-              <a:t>Key</a:t>
-            </a:r>
-          </a:p>
-          <a:p>
-            <a:pPr marL="742950" lvl="1" indent="-285750" algn="ctr">
-              <a:buFont typeface="Arial" panose="020B0604020202020204" pitchFamily="34" charset="0"/>
-              <a:buChar char="•"/>
-            </a:pPr>
-            <a:endParaRPr lang="en-GB" sz="2000" b="1" dirty="0">
-              <a:solidFill>
-                <a:schemeClr val="tx1">
-                  <a:lumMod val="95000"/>
-                  <a:lumOff val="5000"/>
-                </a:schemeClr>
-              </a:solidFill>
-              <a:latin typeface="Abadi" panose="020B0604020104020204" pitchFamily="34" charset="0"/>
-            </a:endParaRPr>
-          </a:p>
-          <a:p>
-            <a:pPr marL="285750" indent="-285750" algn="ctr">
-              <a:buFont typeface="Arial" panose="020B0604020202020204" pitchFamily="34" charset="0"/>
-              <a:buChar char="•"/>
-            </a:pPr>
-            <a:endParaRPr lang="en-GB" sz="2000" b="1" dirty="0">
-              <a:solidFill>
-                <a:schemeClr val="tx1">
-                  <a:lumMod val="95000"/>
-                  <a:lumOff val="5000"/>
-                </a:schemeClr>
-              </a:solidFill>
-              <a:latin typeface="Abadi" panose="020B0604020104020204" pitchFamily="34" charset="0"/>
-            </a:endParaRPr>
-          </a:p>
-          <a:p>
-            <a:pPr algn="ctr"/>
-            <a:endParaRPr lang="en-GB" sz="2000" b="1" dirty="0">
-              <a:solidFill>
-                <a:schemeClr val="tx1">
-                  <a:lumMod val="95000"/>
-                  <a:lumOff val="5000"/>
-                </a:schemeClr>
-              </a:solidFill>
-              <a:effectLst/>
-              <a:latin typeface="Abadi" panose="020B0604020104020204" pitchFamily="34" charset="0"/>
-            </a:endParaRPr>
-          </a:p>
-        </p:txBody>
-      </p:sp>
-      <p:sp>
-        <p:nvSpPr>
-          <p:cNvPr id="35" name="Rectangle 34">
-            <a:extLst>
-              <a:ext uri="{FF2B5EF4-FFF2-40B4-BE49-F238E27FC236}">
-                <a16:creationId xmlns:a16="http://schemas.microsoft.com/office/drawing/2014/main" id="{B9A9DC38-509A-ECDF-8592-100C85A19A4F}"/>
-              </a:ext>
-            </a:extLst>
-          </p:cNvPr>
-          <p:cNvSpPr/>
-          <p:nvPr/>
-        </p:nvSpPr>
-        <p:spPr>
           <a:xfrm flipH="1">
-            <a:off x="5295730" y="6180350"/>
-            <a:ext cx="800270" cy="231499"/>
+            <a:off x="2744531" y="3880043"/>
+            <a:ext cx="1972800" cy="570269"/>
           </a:xfrm>
           <a:prstGeom prst="rect">
             <a:avLst/>
@@ -7912,10 +7724,10 @@
       </p:sp>
       <p:sp>
         <p:nvSpPr>
-          <p:cNvPr id="37" name="Rectangle 36">
-            <a:extLst>
-              <a:ext uri="{FF2B5EF4-FFF2-40B4-BE49-F238E27FC236}">
-                <a16:creationId xmlns:a16="http://schemas.microsoft.com/office/drawing/2014/main" id="{765811BF-7BC5-B9F3-E525-A1561C0D2C6B}"/>
+          <p:cNvPr id="16" name="Rectangle 15">
+            <a:extLst>
+              <a:ext uri="{FF2B5EF4-FFF2-40B4-BE49-F238E27FC236}">
+                <a16:creationId xmlns:a16="http://schemas.microsoft.com/office/drawing/2014/main" id="{CA60DD44-4AAC-A0A1-B95C-A94B23A0EAB6}"/>
               </a:ext>
             </a:extLst>
           </p:cNvPr>
@@ -7924,8 +7736,8 @@
         </p:nvSpPr>
         <p:spPr>
           <a:xfrm flipH="1">
-            <a:off x="725468" y="2166789"/>
-            <a:ext cx="3013761" cy="710900"/>
+            <a:off x="2744531" y="4450312"/>
+            <a:ext cx="1972800" cy="982685"/>
           </a:xfrm>
           <a:prstGeom prst="rect">
             <a:avLst/>
@@ -7967,50 +7779,10 @@
       </p:sp>
       <p:sp>
         <p:nvSpPr>
-          <p:cNvPr id="38" name="TextBox 37">
-            <a:extLst>
-              <a:ext uri="{FF2B5EF4-FFF2-40B4-BE49-F238E27FC236}">
-                <a16:creationId xmlns:a16="http://schemas.microsoft.com/office/drawing/2014/main" id="{B62491A7-5E51-B460-3BAA-DDA8F3089CF5}"/>
-              </a:ext>
-            </a:extLst>
-          </p:cNvPr>
-          <p:cNvSpPr txBox="1"/>
-          <p:nvPr/>
-        </p:nvSpPr>
-        <p:spPr>
-          <a:xfrm>
-            <a:off x="5017153" y="6385478"/>
-            <a:ext cx="1456745" cy="369332"/>
-          </a:xfrm>
-          <a:prstGeom prst="rect">
-            <a:avLst/>
-          </a:prstGeom>
-          <a:noFill/>
-        </p:spPr>
-        <p:txBody>
-          <a:bodyPr wrap="none" rtlCol="0">
-            <a:spAutoFit/>
-          </a:bodyPr>
-          <a:lstStyle/>
-          <a:p>
-            <a:r>
-              <a:rPr lang="en-GB" b="1" dirty="0">
-                <a:solidFill>
-                  <a:srgbClr val="C00000"/>
-                </a:solidFill>
-                <a:latin typeface="Abadi" panose="020B0604020104020204" pitchFamily="34" charset="0"/>
-              </a:rPr>
-              <a:t>Start Import</a:t>
-            </a:r>
-          </a:p>
-        </p:txBody>
-      </p:sp>
-      <p:sp>
-        <p:nvSpPr>
-          <p:cNvPr id="2" name="Rectangle 1">
-            <a:extLst>
-              <a:ext uri="{FF2B5EF4-FFF2-40B4-BE49-F238E27FC236}">
-                <a16:creationId xmlns:a16="http://schemas.microsoft.com/office/drawing/2014/main" id="{1F85017C-92DA-06D5-F592-0A5D0A94C8F8}"/>
+          <p:cNvPr id="25" name="Rectangle 24">
+            <a:extLst>
+              <a:ext uri="{FF2B5EF4-FFF2-40B4-BE49-F238E27FC236}">
+                <a16:creationId xmlns:a16="http://schemas.microsoft.com/office/drawing/2014/main" id="{C92E233F-21F4-DDBF-AD4C-14BD5791A307}"/>
               </a:ext>
             </a:extLst>
           </p:cNvPr>
@@ -8019,8 +7791,8 @@
         </p:nvSpPr>
         <p:spPr>
           <a:xfrm flipH="1">
-            <a:off x="765031" y="4449871"/>
-            <a:ext cx="2970363" cy="647970"/>
+            <a:off x="662018" y="5926536"/>
+            <a:ext cx="947705" cy="231499"/>
           </a:xfrm>
           <a:prstGeom prst="rect">
             <a:avLst/>
@@ -8062,10 +7834,10 @@
       </p:sp>
       <p:sp>
         <p:nvSpPr>
-          <p:cNvPr id="4" name="TextBox 3">
-            <a:extLst>
-              <a:ext uri="{FF2B5EF4-FFF2-40B4-BE49-F238E27FC236}">
-                <a16:creationId xmlns:a16="http://schemas.microsoft.com/office/drawing/2014/main" id="{09DAADF2-5275-8F3B-2F58-FDD941DA77DB}"/>
+          <p:cNvPr id="39" name="TextBox 38">
+            <a:extLst>
+              <a:ext uri="{FF2B5EF4-FFF2-40B4-BE49-F238E27FC236}">
+                <a16:creationId xmlns:a16="http://schemas.microsoft.com/office/drawing/2014/main" id="{88671FE7-A704-6D47-C950-F08D67CB0731}"/>
               </a:ext>
             </a:extLst>
           </p:cNvPr>
@@ -8074,8 +7846,8 @@
         </p:nvSpPr>
         <p:spPr>
           <a:xfrm>
-            <a:off x="368063" y="5014057"/>
-            <a:ext cx="330540" cy="369332"/>
+            <a:off x="585209" y="6121646"/>
+            <a:ext cx="3151312" cy="369332"/>
           </a:xfrm>
           <a:prstGeom prst="rect">
             <a:avLst/>
@@ -8095,7 +7867,7 @@
                 </a:solidFill>
                 <a:latin typeface="Abadi" panose="020B0604020104020204" pitchFamily="34" charset="0"/>
               </a:rPr>
-              <a:t>5</a:t>
+              <a:t>Import or Export All settings</a:t>
             </a:r>
           </a:p>
         </p:txBody>
@@ -18051,15 +17823,20 @@
           <p:nvPr/>
         </p:nvPicPr>
         <p:blipFill>
-          <a:blip r:embed="rId3"/>
-          <a:stretch>
-            <a:fillRect/>
-          </a:stretch>
+          <a:blip r:embed="rId3">
+            <a:extLst>
+              <a:ext uri="{28A0092B-C50C-407E-A947-70E740481C1C}">
+                <a14:useLocalDpi xmlns:a14="http://schemas.microsoft.com/office/drawing/2010/main" val="0"/>
+              </a:ext>
+            </a:extLst>
+          </a:blip>
+          <a:srcRect/>
+          <a:stretch/>
         </p:blipFill>
         <p:spPr>
           <a:xfrm>
-            <a:off x="8120059" y="1496408"/>
-            <a:ext cx="3531626" cy="3719146"/>
+            <a:off x="8281225" y="1496408"/>
+            <a:ext cx="3209294" cy="3719146"/>
           </a:xfrm>
           <a:prstGeom prst="rect">
             <a:avLst/>
@@ -18232,8 +18009,8 @@
         </p:blipFill>
         <p:spPr>
           <a:xfrm>
-            <a:off x="716935" y="1232014"/>
-            <a:ext cx="4739025" cy="4942468"/>
+            <a:off x="953991" y="1232014"/>
+            <a:ext cx="4264913" cy="4942468"/>
           </a:xfrm>
           <a:prstGeom prst="rect">
             <a:avLst/>
@@ -18254,8 +18031,8 @@
         </p:nvSpPr>
         <p:spPr>
           <a:xfrm flipH="1">
-            <a:off x="861644" y="1640817"/>
-            <a:ext cx="4519247" cy="707887"/>
+            <a:off x="1036318" y="1478280"/>
+            <a:ext cx="4090235" cy="960119"/>
           </a:xfrm>
           <a:prstGeom prst="rect">
             <a:avLst/>
@@ -18397,7 +18174,7 @@
               <a:rPr lang="en-GB" sz="1400" dirty="0">
                 <a:latin typeface="Abadi" panose="020B0604020104020204" pitchFamily="34" charset="0"/>
               </a:rPr>
-              <a:t>Settings:</a:t>
+              <a:t>Settings</a:t>
             </a:r>
           </a:p>
           <a:p>
@@ -18580,8 +18357,8 @@
         </p:nvSpPr>
         <p:spPr>
           <a:xfrm flipH="1">
-            <a:off x="936711" y="2677929"/>
-            <a:ext cx="1278949" cy="1014840"/>
+            <a:off x="1077833" y="2543337"/>
+            <a:ext cx="1278949" cy="1119778"/>
           </a:xfrm>
           <a:prstGeom prst="rect">
             <a:avLst/>
@@ -18635,8 +18412,8 @@
         </p:nvSpPr>
         <p:spPr>
           <a:xfrm flipH="1">
-            <a:off x="2215659" y="2677929"/>
-            <a:ext cx="3165231" cy="1014840"/>
+            <a:off x="2356781" y="2543336"/>
+            <a:ext cx="2769772" cy="1198083"/>
           </a:xfrm>
           <a:prstGeom prst="rect">
             <a:avLst/>
@@ -18690,7 +18467,7 @@
         </p:nvSpPr>
         <p:spPr>
           <a:xfrm>
-            <a:off x="415249" y="1538092"/>
+            <a:off x="663879" y="1440226"/>
             <a:ext cx="272832" cy="369332"/>
           </a:xfrm>
           <a:prstGeom prst="rect">
@@ -18730,7 +18507,7 @@
         </p:nvSpPr>
         <p:spPr>
           <a:xfrm>
-            <a:off x="420650" y="2594924"/>
+            <a:off x="652539" y="2487934"/>
             <a:ext cx="330540" cy="369332"/>
           </a:xfrm>
           <a:prstGeom prst="rect">
@@ -18770,7 +18547,7 @@
         </p:nvSpPr>
         <p:spPr>
           <a:xfrm>
-            <a:off x="5450559" y="2594924"/>
+            <a:off x="5126553" y="2499999"/>
             <a:ext cx="330540" cy="369332"/>
           </a:xfrm>
           <a:prstGeom prst="rect">
@@ -18810,8 +18587,8 @@
         </p:nvSpPr>
         <p:spPr>
           <a:xfrm flipH="1">
-            <a:off x="1567337" y="5336931"/>
-            <a:ext cx="2222147" cy="211016"/>
+            <a:off x="1085352" y="5505740"/>
+            <a:ext cx="1993128" cy="217101"/>
           </a:xfrm>
           <a:prstGeom prst="rect">
             <a:avLst/>
@@ -18865,7 +18642,7 @@
         </p:nvSpPr>
         <p:spPr>
           <a:xfrm>
-            <a:off x="3798274" y="5269937"/>
+            <a:off x="953991" y="5690406"/>
             <a:ext cx="330540" cy="369332"/>
           </a:xfrm>
           <a:prstGeom prst="rect">
@@ -18905,8 +18682,8 @@
         </p:nvSpPr>
         <p:spPr>
           <a:xfrm flipH="1">
-            <a:off x="936711" y="5662245"/>
-            <a:ext cx="654697" cy="211016"/>
+            <a:off x="1998558" y="5294724"/>
+            <a:ext cx="530080" cy="211016"/>
           </a:xfrm>
           <a:prstGeom prst="rect">
             <a:avLst/>
@@ -18960,7 +18737,7 @@
         </p:nvSpPr>
         <p:spPr>
           <a:xfrm>
-            <a:off x="451917" y="5583087"/>
+            <a:off x="2528638" y="5161286"/>
             <a:ext cx="330540" cy="369332"/>
           </a:xfrm>
           <a:prstGeom prst="rect">
@@ -19000,8 +18777,8 @@
         </p:nvSpPr>
         <p:spPr>
           <a:xfrm flipH="1">
-            <a:off x="936711" y="5336931"/>
-            <a:ext cx="630626" cy="211016"/>
+            <a:off x="1085350" y="5288638"/>
+            <a:ext cx="822275" cy="217102"/>
           </a:xfrm>
           <a:prstGeom prst="rect">
             <a:avLst/>
@@ -19055,7 +18832,7 @@
         </p:nvSpPr>
         <p:spPr>
           <a:xfrm>
-            <a:off x="460661" y="5269937"/>
+            <a:off x="666842" y="5161286"/>
             <a:ext cx="330540" cy="369332"/>
           </a:xfrm>
           <a:prstGeom prst="rect">
@@ -19781,8 +19558,8 @@
         </p:blipFill>
         <p:spPr>
           <a:xfrm>
-            <a:off x="716935" y="1219759"/>
-            <a:ext cx="4739025" cy="4966978"/>
+            <a:off x="947152" y="1219759"/>
+            <a:ext cx="4278590" cy="4966978"/>
           </a:xfrm>
           <a:prstGeom prst="rect">
             <a:avLst/>
@@ -19791,10 +19568,74 @@
       </p:pic>
       <p:sp>
         <p:nvSpPr>
-          <p:cNvPr id="17" name="Rectangle 16">
-            <a:extLst>
-              <a:ext uri="{FF2B5EF4-FFF2-40B4-BE49-F238E27FC236}">
-                <a16:creationId xmlns:a16="http://schemas.microsoft.com/office/drawing/2014/main" id="{2D2CA4D1-E5C0-D31E-18C5-9ACB9DD66236}"/>
+          <p:cNvPr id="2" name="TextBox 1">
+            <a:extLst>
+              <a:ext uri="{FF2B5EF4-FFF2-40B4-BE49-F238E27FC236}">
+                <a16:creationId xmlns:a16="http://schemas.microsoft.com/office/drawing/2014/main" id="{E95B40D0-C277-3498-BAE0-3A9B745E0515}"/>
+              </a:ext>
+            </a:extLst>
+          </p:cNvPr>
+          <p:cNvSpPr txBox="1"/>
+          <p:nvPr/>
+        </p:nvSpPr>
+        <p:spPr>
+          <a:xfrm>
+            <a:off x="7487728" y="2000821"/>
+            <a:ext cx="4416988" cy="1169551"/>
+          </a:xfrm>
+          <a:prstGeom prst="rect">
+            <a:avLst/>
+          </a:prstGeom>
+          <a:noFill/>
+        </p:spPr>
+        <p:txBody>
+          <a:bodyPr wrap="square" rtlCol="0">
+            <a:spAutoFit/>
+          </a:bodyPr>
+          <a:lstStyle/>
+          <a:p>
+            <a:pPr marL="342900" indent="-342900">
+              <a:buFont typeface="+mj-lt"/>
+              <a:buAutoNum type="arabicPeriod"/>
+            </a:pPr>
+            <a:r>
+              <a:rPr lang="en-GB" sz="1400" dirty="0">
+                <a:latin typeface="Abadi" panose="020B0604020104020204" pitchFamily="34" charset="0"/>
+              </a:rPr>
+              <a:t>Write the embodied carbon values into a specified Revit instance parameter.</a:t>
+            </a:r>
+          </a:p>
+          <a:p>
+            <a:pPr marL="342900" indent="-342900">
+              <a:buFont typeface="+mj-lt"/>
+              <a:buAutoNum type="arabicPeriod"/>
+            </a:pPr>
+            <a:endParaRPr lang="en-GB" sz="1400" dirty="0">
+              <a:latin typeface="Abadi" panose="020B0604020104020204" pitchFamily="34" charset="0"/>
+            </a:endParaRPr>
+          </a:p>
+          <a:p>
+            <a:pPr marL="800100" lvl="1" indent="-342900">
+              <a:buFont typeface="+mj-lt"/>
+              <a:buAutoNum type="arabicPeriod"/>
+            </a:pPr>
+            <a:endParaRPr lang="en-GB" sz="1400" dirty="0">
+              <a:latin typeface="Abadi" panose="020B0604020104020204" pitchFamily="34" charset="0"/>
+            </a:endParaRPr>
+          </a:p>
+          <a:p>
+            <a:endParaRPr lang="en-GB" sz="1400" dirty="0">
+              <a:latin typeface="Abadi" panose="020B0604020104020204" pitchFamily="34" charset="0"/>
+            </a:endParaRPr>
+          </a:p>
+        </p:txBody>
+      </p:sp>
+      <p:sp>
+        <p:nvSpPr>
+          <p:cNvPr id="3" name="Rectangle 2">
+            <a:extLst>
+              <a:ext uri="{FF2B5EF4-FFF2-40B4-BE49-F238E27FC236}">
+                <a16:creationId xmlns:a16="http://schemas.microsoft.com/office/drawing/2014/main" id="{471DCEA8-39AB-40B4-7701-BD443799D21C}"/>
               </a:ext>
             </a:extLst>
           </p:cNvPr>
@@ -19802,9 +19643,109 @@
           <p:nvPr/>
         </p:nvSpPr>
         <p:spPr>
+          <a:xfrm>
+            <a:off x="6669988" y="1640817"/>
+            <a:ext cx="2170981" cy="1631216"/>
+          </a:xfrm>
+          <a:prstGeom prst="rect">
+            <a:avLst/>
+          </a:prstGeom>
+        </p:spPr>
+        <p:txBody>
+          <a:bodyPr wrap="square">
+            <a:spAutoFit/>
+          </a:bodyPr>
+          <a:lstStyle/>
+          <a:p>
+            <a:pPr algn="ctr"/>
+            <a:r>
+              <a:rPr lang="en-GB" sz="2000" b="1" dirty="0">
+                <a:solidFill>
+                  <a:schemeClr val="tx1">
+                    <a:lumMod val="95000"/>
+                    <a:lumOff val="5000"/>
+                  </a:schemeClr>
+                </a:solidFill>
+                <a:effectLst/>
+                <a:latin typeface="Abadi" panose="020B0604020104020204" pitchFamily="34" charset="0"/>
+              </a:rPr>
+              <a:t>Key</a:t>
+            </a:r>
+          </a:p>
+          <a:p>
+            <a:pPr marL="742950" lvl="1" indent="-285750" algn="ctr">
+              <a:buFont typeface="Arial" panose="020B0604020202020204" pitchFamily="34" charset="0"/>
+              <a:buChar char="•"/>
+            </a:pPr>
+            <a:endParaRPr lang="en-GB" sz="2000" b="1" dirty="0">
+              <a:solidFill>
+                <a:schemeClr val="tx1">
+                  <a:lumMod val="95000"/>
+                  <a:lumOff val="5000"/>
+                </a:schemeClr>
+              </a:solidFill>
+              <a:latin typeface="Abadi" panose="020B0604020104020204" pitchFamily="34" charset="0"/>
+            </a:endParaRPr>
+          </a:p>
+          <a:p>
+            <a:pPr marL="285750" indent="-285750" algn="ctr">
+              <a:buFont typeface="Arial" panose="020B0604020202020204" pitchFamily="34" charset="0"/>
+              <a:buChar char="•"/>
+            </a:pPr>
+            <a:endParaRPr lang="en-GB" sz="2000" b="1" dirty="0">
+              <a:solidFill>
+                <a:schemeClr val="tx1">
+                  <a:lumMod val="95000"/>
+                  <a:lumOff val="5000"/>
+                </a:schemeClr>
+              </a:solidFill>
+              <a:latin typeface="Abadi" panose="020B0604020104020204" pitchFamily="34" charset="0"/>
+            </a:endParaRPr>
+          </a:p>
+          <a:p>
+            <a:pPr algn="ctr"/>
+            <a:endParaRPr lang="en-GB" sz="2000" b="1" dirty="0">
+              <a:solidFill>
+                <a:schemeClr val="tx1">
+                  <a:lumMod val="95000"/>
+                  <a:lumOff val="5000"/>
+                </a:schemeClr>
+              </a:solidFill>
+              <a:effectLst/>
+              <a:latin typeface="Abadi" panose="020B0604020104020204" pitchFamily="34" charset="0"/>
+            </a:endParaRPr>
+          </a:p>
+          <a:p>
+            <a:pPr algn="ctr"/>
+            <a:endParaRPr lang="en-GB" sz="2000" b="1" dirty="0">
+              <a:solidFill>
+                <a:schemeClr val="tx1">
+                  <a:lumMod val="95000"/>
+                  <a:lumOff val="5000"/>
+                </a:schemeClr>
+              </a:solidFill>
+              <a:effectLst/>
+              <a:latin typeface="Abadi" panose="020B0604020104020204" pitchFamily="34" charset="0"/>
+            </a:endParaRPr>
+          </a:p>
+        </p:txBody>
+      </p:sp>
+      <p:sp>
+        <p:nvSpPr>
+          <p:cNvPr id="4" name="Rectangle 3">
+            <a:extLst>
+              <a:ext uri="{FF2B5EF4-FFF2-40B4-BE49-F238E27FC236}">
+                <a16:creationId xmlns:a16="http://schemas.microsoft.com/office/drawing/2014/main" id="{5FF37CD7-F0F5-2CD8-0A02-EFB8BE9DF90B}"/>
+              </a:ext>
+            </a:extLst>
+          </p:cNvPr>
+          <p:cNvSpPr/>
+          <p:nvPr/>
+        </p:nvSpPr>
+        <p:spPr>
           <a:xfrm flipH="1">
-            <a:off x="861644" y="1640817"/>
-            <a:ext cx="4519247" cy="707887"/>
+            <a:off x="1055620" y="3094010"/>
+            <a:ext cx="3996439" cy="274795"/>
           </a:xfrm>
           <a:prstGeom prst="rect">
             <a:avLst/>
@@ -19846,10 +19787,10 @@
       </p:sp>
       <p:sp>
         <p:nvSpPr>
-          <p:cNvPr id="2" name="TextBox 1">
-            <a:extLst>
-              <a:ext uri="{FF2B5EF4-FFF2-40B4-BE49-F238E27FC236}">
-                <a16:creationId xmlns:a16="http://schemas.microsoft.com/office/drawing/2014/main" id="{E95B40D0-C277-3498-BAE0-3A9B745E0515}"/>
+          <p:cNvPr id="15" name="TextBox 14">
+            <a:extLst>
+              <a:ext uri="{FF2B5EF4-FFF2-40B4-BE49-F238E27FC236}">
+                <a16:creationId xmlns:a16="http://schemas.microsoft.com/office/drawing/2014/main" id="{A4C020AC-42BF-95F0-F453-24DE17DFBF34}"/>
               </a:ext>
             </a:extLst>
           </p:cNvPr>
@@ -19858,283 +19799,7 @@
         </p:nvSpPr>
         <p:spPr>
           <a:xfrm>
-            <a:off x="7487728" y="2000821"/>
-            <a:ext cx="4416988" cy="2246769"/>
-          </a:xfrm>
-          <a:prstGeom prst="rect">
-            <a:avLst/>
-          </a:prstGeom>
-          <a:noFill/>
-        </p:spPr>
-        <p:txBody>
-          <a:bodyPr wrap="square" rtlCol="0">
-            <a:spAutoFit/>
-          </a:bodyPr>
-          <a:lstStyle/>
-          <a:p>
-            <a:pPr marL="342900" indent="-342900">
-              <a:buFont typeface="+mj-lt"/>
-              <a:buAutoNum type="arabicPeriod"/>
-            </a:pPr>
-            <a:r>
-              <a:rPr lang="en-GB" sz="1400" dirty="0">
-                <a:latin typeface="Abadi" panose="020B0604020104020204" pitchFamily="34" charset="0"/>
-              </a:rPr>
-              <a:t>Project information	</a:t>
-            </a:r>
-          </a:p>
-          <a:p>
-            <a:pPr marL="800100" lvl="1" indent="-342900">
-              <a:buFont typeface="+mj-lt"/>
-              <a:buAutoNum type="arabicPeriod"/>
-            </a:pPr>
-            <a:r>
-              <a:rPr lang="en-GB" sz="1400" dirty="0">
-                <a:latin typeface="Abadi" panose="020B0604020104020204" pitchFamily="34" charset="0"/>
-              </a:rPr>
-              <a:t>Open a new project dataset / </a:t>
-            </a:r>
-          </a:p>
-          <a:p>
-            <a:pPr marL="800100" lvl="1" indent="-342900">
-              <a:buFont typeface="+mj-lt"/>
-              <a:buAutoNum type="arabicPeriod"/>
-            </a:pPr>
-            <a:r>
-              <a:rPr lang="en-GB" sz="1400" dirty="0">
-                <a:latin typeface="Abadi" panose="020B0604020104020204" pitchFamily="34" charset="0"/>
-              </a:rPr>
-              <a:t>edit the project</a:t>
-            </a:r>
-          </a:p>
-          <a:p>
-            <a:pPr marL="342900" indent="-342900">
-              <a:buFont typeface="+mj-lt"/>
-              <a:buAutoNum type="arabicPeriod"/>
-            </a:pPr>
-            <a:endParaRPr lang="en-GB" sz="1400" dirty="0">
-              <a:latin typeface="Abadi" panose="020B0604020104020204" pitchFamily="34" charset="0"/>
-            </a:endParaRPr>
-          </a:p>
-          <a:p>
-            <a:pPr marL="342900" indent="-342900">
-              <a:buFont typeface="+mj-lt"/>
-              <a:buAutoNum type="arabicPeriod"/>
-            </a:pPr>
-            <a:r>
-              <a:rPr lang="en-GB" sz="1400" dirty="0">
-                <a:latin typeface="Abadi" panose="020B0604020104020204" pitchFamily="34" charset="0"/>
-              </a:rPr>
-              <a:t>Write the embodied carbon values into a specified Revit instance parameter.</a:t>
-            </a:r>
-          </a:p>
-          <a:p>
-            <a:pPr marL="342900" indent="-342900">
-              <a:buFont typeface="+mj-lt"/>
-              <a:buAutoNum type="arabicPeriod"/>
-            </a:pPr>
-            <a:endParaRPr lang="en-GB" sz="1400" dirty="0">
-              <a:latin typeface="Abadi" panose="020B0604020104020204" pitchFamily="34" charset="0"/>
-            </a:endParaRPr>
-          </a:p>
-          <a:p>
-            <a:pPr marL="342900" indent="-342900">
-              <a:buFont typeface="+mj-lt"/>
-              <a:buAutoNum type="arabicPeriod"/>
-            </a:pPr>
-            <a:r>
-              <a:rPr lang="en-GB" sz="1400" dirty="0">
-                <a:latin typeface="Abadi" panose="020B0604020104020204" pitchFamily="34" charset="0"/>
-              </a:rPr>
-              <a:t>Create a View with all the calculation results.</a:t>
-            </a:r>
-          </a:p>
-          <a:p>
-            <a:pPr marL="800100" lvl="1" indent="-342900">
-              <a:buFont typeface="+mj-lt"/>
-              <a:buAutoNum type="arabicPeriod"/>
-            </a:pPr>
-            <a:endParaRPr lang="en-GB" sz="1400" dirty="0">
-              <a:latin typeface="Abadi" panose="020B0604020104020204" pitchFamily="34" charset="0"/>
-            </a:endParaRPr>
-          </a:p>
-          <a:p>
-            <a:endParaRPr lang="en-GB" sz="1400" dirty="0">
-              <a:latin typeface="Abadi" panose="020B0604020104020204" pitchFamily="34" charset="0"/>
-            </a:endParaRPr>
-          </a:p>
-        </p:txBody>
-      </p:sp>
-      <p:sp>
-        <p:nvSpPr>
-          <p:cNvPr id="3" name="Rectangle 2">
-            <a:extLst>
-              <a:ext uri="{FF2B5EF4-FFF2-40B4-BE49-F238E27FC236}">
-                <a16:creationId xmlns:a16="http://schemas.microsoft.com/office/drawing/2014/main" id="{471DCEA8-39AB-40B4-7701-BD443799D21C}"/>
-              </a:ext>
-            </a:extLst>
-          </p:cNvPr>
-          <p:cNvSpPr/>
-          <p:nvPr/>
-        </p:nvSpPr>
-        <p:spPr>
-          <a:xfrm>
-            <a:off x="6669988" y="1640817"/>
-            <a:ext cx="2170981" cy="1631216"/>
-          </a:xfrm>
-          <a:prstGeom prst="rect">
-            <a:avLst/>
-          </a:prstGeom>
-        </p:spPr>
-        <p:txBody>
-          <a:bodyPr wrap="square">
-            <a:spAutoFit/>
-          </a:bodyPr>
-          <a:lstStyle/>
-          <a:p>
-            <a:pPr algn="ctr"/>
-            <a:r>
-              <a:rPr lang="en-GB" sz="2000" b="1" dirty="0">
-                <a:solidFill>
-                  <a:schemeClr val="tx1">
-                    <a:lumMod val="95000"/>
-                    <a:lumOff val="5000"/>
-                  </a:schemeClr>
-                </a:solidFill>
-                <a:effectLst/>
-                <a:latin typeface="Abadi" panose="020B0604020104020204" pitchFamily="34" charset="0"/>
-              </a:rPr>
-              <a:t>Key</a:t>
-            </a:r>
-          </a:p>
-          <a:p>
-            <a:pPr marL="742950" lvl="1" indent="-285750" algn="ctr">
-              <a:buFont typeface="Arial" panose="020B0604020202020204" pitchFamily="34" charset="0"/>
-              <a:buChar char="•"/>
-            </a:pPr>
-            <a:endParaRPr lang="en-GB" sz="2000" b="1" dirty="0">
-              <a:solidFill>
-                <a:schemeClr val="tx1">
-                  <a:lumMod val="95000"/>
-                  <a:lumOff val="5000"/>
-                </a:schemeClr>
-              </a:solidFill>
-              <a:latin typeface="Abadi" panose="020B0604020104020204" pitchFamily="34" charset="0"/>
-            </a:endParaRPr>
-          </a:p>
-          <a:p>
-            <a:pPr marL="285750" indent="-285750" algn="ctr">
-              <a:buFont typeface="Arial" panose="020B0604020202020204" pitchFamily="34" charset="0"/>
-              <a:buChar char="•"/>
-            </a:pPr>
-            <a:endParaRPr lang="en-GB" sz="2000" b="1" dirty="0">
-              <a:solidFill>
-                <a:schemeClr val="tx1">
-                  <a:lumMod val="95000"/>
-                  <a:lumOff val="5000"/>
-                </a:schemeClr>
-              </a:solidFill>
-              <a:latin typeface="Abadi" panose="020B0604020104020204" pitchFamily="34" charset="0"/>
-            </a:endParaRPr>
-          </a:p>
-          <a:p>
-            <a:pPr algn="ctr"/>
-            <a:endParaRPr lang="en-GB" sz="2000" b="1" dirty="0">
-              <a:solidFill>
-                <a:schemeClr val="tx1">
-                  <a:lumMod val="95000"/>
-                  <a:lumOff val="5000"/>
-                </a:schemeClr>
-              </a:solidFill>
-              <a:effectLst/>
-              <a:latin typeface="Abadi" panose="020B0604020104020204" pitchFamily="34" charset="0"/>
-            </a:endParaRPr>
-          </a:p>
-          <a:p>
-            <a:pPr algn="ctr"/>
-            <a:endParaRPr lang="en-GB" sz="2000" b="1" dirty="0">
-              <a:solidFill>
-                <a:schemeClr val="tx1">
-                  <a:lumMod val="95000"/>
-                  <a:lumOff val="5000"/>
-                </a:schemeClr>
-              </a:solidFill>
-              <a:effectLst/>
-              <a:latin typeface="Abadi" panose="020B0604020104020204" pitchFamily="34" charset="0"/>
-            </a:endParaRPr>
-          </a:p>
-        </p:txBody>
-      </p:sp>
-      <p:sp>
-        <p:nvSpPr>
-          <p:cNvPr id="4" name="Rectangle 3">
-            <a:extLst>
-              <a:ext uri="{FF2B5EF4-FFF2-40B4-BE49-F238E27FC236}">
-                <a16:creationId xmlns:a16="http://schemas.microsoft.com/office/drawing/2014/main" id="{5FF37CD7-F0F5-2CD8-0A02-EFB8BE9DF90B}"/>
-              </a:ext>
-            </a:extLst>
-          </p:cNvPr>
-          <p:cNvSpPr/>
-          <p:nvPr/>
-        </p:nvSpPr>
-        <p:spPr>
-          <a:xfrm flipH="1">
-            <a:off x="3158741" y="2807633"/>
-            <a:ext cx="2222147" cy="274795"/>
-          </a:xfrm>
-          <a:prstGeom prst="rect">
-            <a:avLst/>
-          </a:prstGeom>
-          <a:noFill/>
-          <a:ln w="28575">
-            <a:solidFill>
-              <a:srgbClr val="C00000"/>
-            </a:solidFill>
-            <a:prstDash val="dash"/>
-          </a:ln>
-        </p:spPr>
-        <p:style>
-          <a:lnRef idx="2">
-            <a:schemeClr val="accent1">
-              <a:shade val="15000"/>
-            </a:schemeClr>
-          </a:lnRef>
-          <a:fillRef idx="1">
-            <a:schemeClr val="accent1"/>
-          </a:fillRef>
-          <a:effectRef idx="0">
-            <a:schemeClr val="accent1"/>
-          </a:effectRef>
-          <a:fontRef idx="minor">
-            <a:schemeClr val="lt1"/>
-          </a:fontRef>
-        </p:style>
-        <p:txBody>
-          <a:bodyPr rtlCol="0" anchor="ctr"/>
-          <a:lstStyle/>
-          <a:p>
-            <a:pPr algn="ctr"/>
-            <a:endParaRPr lang="en-GB" dirty="0">
-              <a:latin typeface="Abadi" panose="020B0604020104020204" pitchFamily="34" charset="0"/>
-            </a:endParaRPr>
-          </a:p>
-        </p:txBody>
-      </p:sp>
-      <p:sp>
-        <p:nvSpPr>
-          <p:cNvPr id="10" name="TextBox 9">
-            <a:extLst>
-              <a:ext uri="{FF2B5EF4-FFF2-40B4-BE49-F238E27FC236}">
-                <a16:creationId xmlns:a16="http://schemas.microsoft.com/office/drawing/2014/main" id="{C8CF6FCF-C705-53B5-DBD4-9164AEFE412A}"/>
-              </a:ext>
-            </a:extLst>
-          </p:cNvPr>
-          <p:cNvSpPr txBox="1"/>
-          <p:nvPr/>
-        </p:nvSpPr>
-        <p:spPr>
-          <a:xfrm>
-            <a:off x="415249" y="1538092"/>
+            <a:off x="5225742" y="2909344"/>
             <a:ext cx="272832" cy="369332"/>
           </a:xfrm>
           <a:prstGeom prst="rect">
@@ -20156,141 +19821,6 @@
                 <a:latin typeface="Abadi" panose="020B0604020104020204" pitchFamily="34" charset="0"/>
               </a:rPr>
               <a:t>1</a:t>
-            </a:r>
-          </a:p>
-        </p:txBody>
-      </p:sp>
-      <p:sp>
-        <p:nvSpPr>
-          <p:cNvPr id="15" name="TextBox 14">
-            <a:extLst>
-              <a:ext uri="{FF2B5EF4-FFF2-40B4-BE49-F238E27FC236}">
-                <a16:creationId xmlns:a16="http://schemas.microsoft.com/office/drawing/2014/main" id="{A4C020AC-42BF-95F0-F453-24DE17DFBF34}"/>
-              </a:ext>
-            </a:extLst>
-          </p:cNvPr>
-          <p:cNvSpPr txBox="1"/>
-          <p:nvPr/>
-        </p:nvSpPr>
-        <p:spPr>
-          <a:xfrm>
-            <a:off x="5450559" y="2594924"/>
-            <a:ext cx="330540" cy="369332"/>
-          </a:xfrm>
-          <a:prstGeom prst="rect">
-            <a:avLst/>
-          </a:prstGeom>
-          <a:noFill/>
-        </p:spPr>
-        <p:txBody>
-          <a:bodyPr wrap="none" rtlCol="0">
-            <a:spAutoFit/>
-          </a:bodyPr>
-          <a:lstStyle/>
-          <a:p>
-            <a:r>
-              <a:rPr lang="en-GB" b="1" dirty="0">
-                <a:solidFill>
-                  <a:srgbClr val="C00000"/>
-                </a:solidFill>
-                <a:latin typeface="Abadi" panose="020B0604020104020204" pitchFamily="34" charset="0"/>
-              </a:rPr>
-              <a:t>2</a:t>
-            </a:r>
-          </a:p>
-        </p:txBody>
-      </p:sp>
-      <p:sp>
-        <p:nvSpPr>
-          <p:cNvPr id="6" name="Rectangle 5">
-            <a:extLst>
-              <a:ext uri="{FF2B5EF4-FFF2-40B4-BE49-F238E27FC236}">
-                <a16:creationId xmlns:a16="http://schemas.microsoft.com/office/drawing/2014/main" id="{5AF2AA9D-21A1-55CB-4365-1B637E52835D}"/>
-              </a:ext>
-            </a:extLst>
-          </p:cNvPr>
-          <p:cNvSpPr/>
-          <p:nvPr/>
-        </p:nvSpPr>
-        <p:spPr>
-          <a:xfrm flipH="1">
-            <a:off x="3158741" y="3763990"/>
-            <a:ext cx="2222147" cy="274795"/>
-          </a:xfrm>
-          <a:prstGeom prst="rect">
-            <a:avLst/>
-          </a:prstGeom>
-          <a:noFill/>
-          <a:ln w="28575">
-            <a:solidFill>
-              <a:srgbClr val="C00000"/>
-            </a:solidFill>
-            <a:prstDash val="dash"/>
-          </a:ln>
-        </p:spPr>
-        <p:style>
-          <a:lnRef idx="2">
-            <a:schemeClr val="accent1">
-              <a:shade val="15000"/>
-            </a:schemeClr>
-          </a:lnRef>
-          <a:fillRef idx="1">
-            <a:schemeClr val="accent1"/>
-          </a:fillRef>
-          <a:effectRef idx="0">
-            <a:schemeClr val="accent1"/>
-          </a:effectRef>
-          <a:fontRef idx="minor">
-            <a:schemeClr val="lt1"/>
-          </a:fontRef>
-        </p:style>
-        <p:txBody>
-          <a:bodyPr rtlCol="0" anchor="ctr"/>
-          <a:lstStyle/>
-          <a:p>
-            <a:pPr algn="ctr"/>
-            <a:endParaRPr lang="en-GB" dirty="0">
-              <a:latin typeface="Abadi" panose="020B0604020104020204" pitchFamily="34" charset="0"/>
-            </a:endParaRPr>
-          </a:p>
-        </p:txBody>
-      </p:sp>
-      <p:sp>
-        <p:nvSpPr>
-          <p:cNvPr id="8" name="TextBox 7">
-            <a:extLst>
-              <a:ext uri="{FF2B5EF4-FFF2-40B4-BE49-F238E27FC236}">
-                <a16:creationId xmlns:a16="http://schemas.microsoft.com/office/drawing/2014/main" id="{CADCD2A9-EE9F-CE1E-0B13-4D06DE2615AA}"/>
-              </a:ext>
-            </a:extLst>
-          </p:cNvPr>
-          <p:cNvSpPr txBox="1"/>
-          <p:nvPr/>
-        </p:nvSpPr>
-        <p:spPr>
-          <a:xfrm>
-            <a:off x="5450559" y="3686912"/>
-            <a:ext cx="330540" cy="369332"/>
-          </a:xfrm>
-          <a:prstGeom prst="rect">
-            <a:avLst/>
-          </a:prstGeom>
-          <a:noFill/>
-        </p:spPr>
-        <p:txBody>
-          <a:bodyPr wrap="none" rtlCol="0">
-            <a:spAutoFit/>
-          </a:bodyPr>
-          <a:lstStyle/>
-          <a:p>
-            <a:r>
-              <a:rPr lang="en-GB" b="1" dirty="0">
-                <a:solidFill>
-                  <a:srgbClr val="C00000"/>
-                </a:solidFill>
-                <a:latin typeface="Abadi" panose="020B0604020104020204" pitchFamily="34" charset="0"/>
-              </a:rPr>
-              <a:t>3</a:t>
             </a:r>
           </a:p>
         </p:txBody>
@@ -20821,7 +20351,7 @@
               <a:rPr lang="en-GB" sz="1600" dirty="0">
                 <a:latin typeface="Abadi" panose="020B0604020104020204" pitchFamily="34" charset="0"/>
               </a:rPr>
-              <a:t>Material Editor (If time)</a:t>
+              <a:t>Material Editor</a:t>
             </a:r>
           </a:p>
         </p:txBody>
